--- a/03-build/pptx/C6plus_U1_docente.pptx
+++ b/03-build/pptx/C6plus_U1_docente.pptx
@@ -6859,7 +6859,6 @@
               <a:srgbClr val="E4E3DE"/>
             </a:solidFill>
           </a:ln>
-          <a:effectLst/>
           <a:effectLst>
             <a:outerShdw blurRad="90000" dist="38000" dir="5400000" rotWithShape="0">
               <a:srgbClr val="20242E">
@@ -7183,7 +7182,6 @@
               <a:srgbClr val="E4E3DE"/>
             </a:solidFill>
           </a:ln>
-          <a:effectLst/>
           <a:effectLst>
             <a:outerShdw blurRad="90000" dist="38000" dir="5400000" rotWithShape="0">
               <a:srgbClr val="20242E">
@@ -7507,7 +7505,6 @@
               <a:srgbClr val="E4E3DE"/>
             </a:solidFill>
           </a:ln>
-          <a:effectLst/>
           <a:effectLst>
             <a:outerShdw blurRad="90000" dist="38000" dir="5400000" rotWithShape="0">
               <a:srgbClr val="20242E">
@@ -7831,7 +7828,6 @@
               <a:srgbClr val="E4E3DE"/>
             </a:solidFill>
           </a:ln>
-          <a:effectLst/>
           <a:effectLst>
             <a:outerShdw blurRad="90000" dist="38000" dir="5400000" rotWithShape="0">
               <a:srgbClr val="20242E">
@@ -9612,7 +9608,6 @@
           <a:ln>
             <a:noFill/>
           </a:ln>
-          <a:effectLst/>
           <a:effectLst>
             <a:outerShdw blurRad="90000" dist="38000" dir="5400000" rotWithShape="0">
               <a:srgbClr val="20242E">
@@ -9728,7 +9723,6 @@
           <a:ln>
             <a:noFill/>
           </a:ln>
-          <a:effectLst/>
           <a:effectLst>
             <a:outerShdw blurRad="90000" dist="38000" dir="5400000" rotWithShape="0">
               <a:srgbClr val="20242E">
@@ -15630,7 +15624,6 @@
               <a:srgbClr val="E4E3DE"/>
             </a:solidFill>
           </a:ln>
-          <a:effectLst/>
           <a:effectLst>
             <a:outerShdw blurRad="90000" dist="38000" dir="5400000" rotWithShape="0">
               <a:srgbClr val="20242E">
@@ -16309,7 +16302,6 @@
               <a:srgbClr val="7C56A9"/>
             </a:solidFill>
           </a:ln>
-          <a:effectLst/>
           <a:effectLst>
             <a:outerShdw blurRad="90000" dist="38000" dir="5400000" rotWithShape="0">
               <a:srgbClr val="20242E">
@@ -23236,7 +23228,6 @@
               <a:srgbClr val="7C56A9"/>
             </a:solidFill>
           </a:ln>
-          <a:effectLst/>
           <a:effectLst>
             <a:outerShdw blurRad="90000" dist="38000" dir="5400000" rotWithShape="0">
               <a:srgbClr val="20242E">
@@ -23470,7 +23461,6 @@
               <a:srgbClr val="7C56A9"/>
             </a:solidFill>
           </a:ln>
-          <a:effectLst/>
           <a:effectLst>
             <a:outerShdw blurRad="90000" dist="38000" dir="5400000" rotWithShape="0">
               <a:srgbClr val="20242E">
@@ -23704,7 +23694,6 @@
               <a:srgbClr val="7C56A9"/>
             </a:solidFill>
           </a:ln>
-          <a:effectLst/>
           <a:effectLst>
             <a:outerShdw blurRad="90000" dist="38000" dir="5400000" rotWithShape="0">
               <a:srgbClr val="20242E">
@@ -25110,7 +25099,6 @@
               <a:srgbClr val="7C56A9"/>
             </a:solidFill>
           </a:ln>
-          <a:effectLst/>
           <a:effectLst>
             <a:outerShdw blurRad="90000" dist="38000" dir="5400000" rotWithShape="0">
               <a:srgbClr val="20242E">
@@ -25563,7 +25551,6 @@
               <a:srgbClr val="E4E3DE"/>
             </a:solidFill>
           </a:ln>
-          <a:effectLst/>
           <a:effectLst>
             <a:outerShdw blurRad="90000" dist="38000" dir="5400000" rotWithShape="0">
               <a:srgbClr val="20242E">
@@ -25796,7 +25783,6 @@
               <a:srgbClr val="E4E3DE"/>
             </a:solidFill>
           </a:ln>
-          <a:effectLst/>
           <a:effectLst>
             <a:outerShdw blurRad="90000" dist="38000" dir="5400000" rotWithShape="0">
               <a:srgbClr val="20242E">
@@ -26925,7 +26911,6 @@
               <a:srgbClr val="7C56A9"/>
             </a:solidFill>
           </a:ln>
-          <a:effectLst/>
           <a:effectLst>
             <a:outerShdw blurRad="90000" dist="38000" dir="5400000" rotWithShape="0">
               <a:srgbClr val="20242E">
@@ -27114,7 +27099,6 @@
               <a:srgbClr val="E4E3DE"/>
             </a:solidFill>
           </a:ln>
-          <a:effectLst/>
           <a:effectLst>
             <a:outerShdw blurRad="90000" dist="38000" dir="5400000" rotWithShape="0">
               <a:srgbClr val="20242E">
@@ -27347,7 +27331,6 @@
               <a:srgbClr val="E4E3DE"/>
             </a:solidFill>
           </a:ln>
-          <a:effectLst/>
           <a:effectLst>
             <a:outerShdw blurRad="90000" dist="38000" dir="5400000" rotWithShape="0">
               <a:srgbClr val="20242E">
@@ -28444,7 +28427,6 @@
               <a:srgbClr val="7C56A9"/>
             </a:solidFill>
           </a:ln>
-          <a:effectLst/>
           <a:effectLst>
             <a:outerShdw blurRad="90000" dist="38000" dir="5400000" rotWithShape="0">
               <a:srgbClr val="20242E">
@@ -28747,7 +28729,6 @@
               <a:srgbClr val="7C56A9"/>
             </a:solidFill>
           </a:ln>
-          <a:effectLst/>
           <a:effectLst>
             <a:outerShdw blurRad="90000" dist="38000" dir="5400000" rotWithShape="0">
               <a:srgbClr val="20242E">
@@ -29050,7 +29031,6 @@
               <a:srgbClr val="7C56A9"/>
             </a:solidFill>
           </a:ln>
-          <a:effectLst/>
           <a:effectLst>
             <a:outerShdw blurRad="90000" dist="38000" dir="5400000" rotWithShape="0">
               <a:srgbClr val="20242E">
@@ -29353,7 +29333,6 @@
               <a:srgbClr val="7C56A9"/>
             </a:solidFill>
           </a:ln>
-          <a:effectLst/>
           <a:effectLst>
             <a:outerShdw blurRad="90000" dist="38000" dir="5400000" rotWithShape="0">
               <a:srgbClr val="20242E">
@@ -29656,7 +29635,6 @@
               <a:srgbClr val="7C56A9"/>
             </a:solidFill>
           </a:ln>
-          <a:effectLst/>
           <a:effectLst>
             <a:outerShdw blurRad="90000" dist="38000" dir="5400000" rotWithShape="0">
               <a:srgbClr val="20242E">
@@ -29959,7 +29937,6 @@
               <a:srgbClr val="5B3E83"/>
             </a:solidFill>
           </a:ln>
-          <a:effectLst/>
           <a:effectLst>
             <a:outerShdw blurRad="90000" dist="38000" dir="5400000" rotWithShape="0">
               <a:srgbClr val="20242E">
@@ -30262,7 +30239,6 @@
               <a:srgbClr val="5B3E83"/>
             </a:solidFill>
           </a:ln>
-          <a:effectLst/>
           <a:effectLst>
             <a:outerShdw blurRad="90000" dist="38000" dir="5400000" rotWithShape="0">
               <a:srgbClr val="20242E">
@@ -30565,7 +30541,6 @@
               <a:srgbClr val="5B3E83"/>
             </a:solidFill>
           </a:ln>
-          <a:effectLst/>
           <a:effectLst>
             <a:outerShdw blurRad="90000" dist="38000" dir="5400000" rotWithShape="0">
               <a:srgbClr val="20242E">
@@ -35362,7 +35337,6 @@
           <a:ln>
             <a:noFill/>
           </a:ln>
-          <a:effectLst/>
           <a:effectLst>
             <a:outerShdw blurRad="90000" dist="38000" dir="5400000" rotWithShape="0">
               <a:srgbClr val="20242E">
@@ -37075,7 +37049,6 @@
           <a:ln>
             <a:noFill/>
           </a:ln>
-          <a:effectLst/>
           <a:effectLst>
             <a:outerShdw blurRad="90000" dist="38000" dir="5400000" rotWithShape="0">
               <a:srgbClr val="20242E">
@@ -37218,7 +37191,6 @@
           <a:ln>
             <a:noFill/>
           </a:ln>
-          <a:effectLst/>
           <a:effectLst>
             <a:outerShdw blurRad="90000" dist="38000" dir="5400000" rotWithShape="0">
               <a:srgbClr val="20242E">
@@ -37361,7 +37333,6 @@
           <a:ln>
             <a:noFill/>
           </a:ln>
-          <a:effectLst/>
           <a:effectLst>
             <a:outerShdw blurRad="90000" dist="38000" dir="5400000" rotWithShape="0">
               <a:srgbClr val="20242E">
@@ -37504,7 +37475,6 @@
           <a:ln>
             <a:noFill/>
           </a:ln>
-          <a:effectLst/>
           <a:effectLst>
             <a:outerShdw blurRad="90000" dist="38000" dir="5400000" rotWithShape="0">
               <a:srgbClr val="20242E">
@@ -37647,7 +37617,6 @@
           <a:ln>
             <a:noFill/>
           </a:ln>
-          <a:effectLst/>
           <a:effectLst>
             <a:outerShdw blurRad="90000" dist="38000" dir="5400000" rotWithShape="0">
               <a:srgbClr val="20242E">
@@ -41871,7 +41840,6 @@
           <a:ln>
             <a:noFill/>
           </a:ln>
-          <a:effectLst/>
           <a:effectLst>
             <a:outerShdw blurRad="90000" dist="38000" dir="5400000" rotWithShape="0">
               <a:srgbClr val="20242E">
@@ -46043,7 +46011,6 @@
               <a:srgbClr val="7C56A9"/>
             </a:solidFill>
           </a:ln>
-          <a:effectLst/>
           <a:effectLst>
             <a:outerShdw blurRad="90000" dist="38000" dir="5400000" rotWithShape="0">
               <a:srgbClr val="20242E">
@@ -46188,7 +46155,6 @@
               <a:srgbClr val="7C56A9"/>
             </a:solidFill>
           </a:ln>
-          <a:effectLst/>
           <a:effectLst>
             <a:outerShdw blurRad="90000" dist="38000" dir="5400000" rotWithShape="0">
               <a:srgbClr val="20242E">
@@ -46333,7 +46299,6 @@
               <a:srgbClr val="7C56A9"/>
             </a:solidFill>
           </a:ln>
-          <a:effectLst/>
           <a:effectLst>
             <a:outerShdw blurRad="90000" dist="38000" dir="5400000" rotWithShape="0">
               <a:srgbClr val="20242E">
@@ -46478,7 +46443,6 @@
               <a:srgbClr val="7C56A9"/>
             </a:solidFill>
           </a:ln>
-          <a:effectLst/>
           <a:effectLst>
             <a:outerShdw blurRad="90000" dist="38000" dir="5400000" rotWithShape="0">
               <a:srgbClr val="20242E">
@@ -46623,7 +46587,6 @@
               <a:srgbClr val="7C56A9"/>
             </a:solidFill>
           </a:ln>
-          <a:effectLst/>
           <a:effectLst>
             <a:outerShdw blurRad="90000" dist="38000" dir="5400000" rotWithShape="0">
               <a:srgbClr val="20242E">
@@ -46768,7 +46731,6 @@
               <a:srgbClr val="7C56A9"/>
             </a:solidFill>
           </a:ln>
-          <a:effectLst/>
           <a:effectLst>
             <a:outerShdw blurRad="90000" dist="38000" dir="5400000" rotWithShape="0">
               <a:srgbClr val="20242E">
@@ -48805,7 +48767,6 @@
           <a:ln>
             <a:noFill/>
           </a:ln>
-          <a:effectLst/>
           <a:effectLst>
             <a:outerShdw blurRad="90000" dist="38000" dir="5400000" rotWithShape="0">
               <a:srgbClr val="20242E">
@@ -48930,7 +48891,6 @@
           <a:ln>
             <a:noFill/>
           </a:ln>
-          <a:effectLst/>
           <a:effectLst>
             <a:outerShdw blurRad="90000" dist="38000" dir="5400000" rotWithShape="0">
               <a:srgbClr val="20242E">
@@ -53057,7 +53017,6 @@
               <a:srgbClr val="7C56A9"/>
             </a:solidFill>
           </a:ln>
-          <a:effectLst/>
           <a:effectLst>
             <a:outerShdw blurRad="90000" dist="38000" dir="5400000" rotWithShape="0">
               <a:srgbClr val="20242E">

--- a/03-build/pptx/C6plus_U1_docente.pptx
+++ b/03-build/pptx/C6plus_U1_docente.pptx
@@ -11,6 +11,9 @@
     <p:sldId id="259" r:id="rId11"/>
     <p:sldId id="260" r:id="rId12"/>
     <p:sldId id="261" r:id="rId13"/>
+    <p:sldId id="279" r:id="rId31"/>
+    <p:sldId id="280" r:id="rId32"/>
+    <p:sldId id="281" r:id="rId33"/>
     <p:sldId id="262" r:id="rId14"/>
     <p:sldId id="263" r:id="rId15"/>
     <p:sldId id="264" r:id="rId16"/>
@@ -1765,6 +1768,255 @@
           </p:nvPr>
         </p:nvSpPr>
         <p:spPr/>
+      </p:sp>
+    </p:spTree>
+  </p:cSld>
+  <p:clrMapOvr>
+    <a:masterClrMapping/>
+  </p:clrMapOvr>
+</p:notes>
+</file>
+
+<file path=ppt/notesSlides/notesSlide24.xml><?xml version="1.0" encoding="utf-8"?>
+<p:notes xmlns:a="http://schemas.openxmlformats.org/drawingml/2006/main" xmlns:p="http://schemas.openxmlformats.org/presentationml/2006/main" xmlns:r="http://schemas.openxmlformats.org/officeDocument/2006/relationships">
+  <p:cSld>
+    <p:spTree>
+      <p:nvGrpSpPr>
+        <p:cNvPr id="1" name=""/>
+        <p:cNvGrpSpPr/>
+        <p:nvPr/>
+      </p:nvGrpSpPr>
+      <p:grpSpPr>
+        <a:xfrm>
+          <a:off x="0" y="0"/>
+          <a:ext cx="0" cy="0"/>
+          <a:chOff x="0" y="0"/>
+          <a:chExt cx="0" cy="0"/>
+        </a:xfrm>
+      </p:grpSpPr>
+      <p:sp>
+        <p:nvSpPr>
+          <p:cNvPr id="2" name="Slide Image Placeholder 1"/>
+          <p:cNvSpPr>
+            <a:spLocks noGrp="1"/>
+          </p:cNvSpPr>
+          <p:nvPr>
+            <p:ph type="sldImg" idx="2"/>
+          </p:nvPr>
+        </p:nvSpPr>
+        <p:spPr/>
+      </p:sp>
+      <p:sp>
+        <p:nvSpPr>
+          <p:cNvPr id="3" name="Notes Placeholder 2"/>
+          <p:cNvSpPr>
+            <a:spLocks noGrp="1"/>
+          </p:cNvSpPr>
+          <p:nvPr>
+            <p:ph type="body" idx="3" sz="quarter"/>
+          </p:nvPr>
+        </p:nvSpPr>
+        <p:spPr/>
+        <p:txBody>
+          <a:bodyPr/>
+          <a:lstStyle/>
+          <a:p>
+            <a:r>
+              <a:t>RETO 4 · Terapia de compañeros de piso — ⚖️ onderhandeling &amp; dilemma</a:t>
+            </a:r>
+          </a:p>
+          <a:p>
+            <a:r>
+              <a:t>OPDRACHT: Twee leggen uit, één bemiddelt. De bemiddelaar vat beide standpunten samen vóór hij voorstelt.</a:t>
+            </a:r>
+          </a:p>
+          <a:p>
+            <a:r>
+              <a:t>DE REGEL: De bemiddelaar mag pas een oplossing voorstellen nadat hij béide standpunten heeft samengevat — in de derde persoon, met reflexieve werkwoorden. Vóór die samenvatting is elk voorstel ongeldig.</a:t>
+            </a:r>
+          </a:p>
+          <a:p>
+            <a:r>
+              <a:t>VERLOOP: Repartid los papeles: A, B y mediador/-a. | A y B cuentan su rutina y su queja. | El mediador resume las dos posturas en tercera persona. | Solo entonces: una propuesta concreta con horas. | ¿Firman los dos? Cambiad de papel.</a:t>
+            </a:r>
+          </a:p>
+          <a:p>
+            <a:r>
+              <a:t>SLEUTEL: De samenvatting in de derde persoon is de eigenlijke oefening: «se levanta a las seis» tegenover «te levantas a las seis». Wie de rol van bemiddelaar goed speelt, vervoegt het hele reflexieve paradigma zonder dat het een drill lijkt.  ||  «Si te he entendido bien» is de sleutelchunk van bemiddelen en komt in elke ronde terug.  ||  Beide bewoners hebben gelijk: er is geen schuldige. Elk voorstel dat één van de twee vraagt zijn ritme volledig om te gooien, wordt niet getekend — en dat hoort zo.</a:t>
+            </a:r>
+          </a:p>
+          <a:p>
+            <a:r>
+              <a:t>NOTA: Drie ronden met wisselende rollen zorgt dat iedereen één keer bemiddelaar is. Dat is de rol waar het meeste Spaans in zit.</a:t>
+            </a:r>
+          </a:p>
+        </p:txBody>
+      </p:sp>
+    </p:spTree>
+  </p:cSld>
+  <p:clrMapOvr>
+    <a:masterClrMapping/>
+  </p:clrMapOvr>
+</p:notes>
+</file>
+
+<file path=ppt/notesSlides/notesSlide25.xml><?xml version="1.0" encoding="utf-8"?>
+<p:notes xmlns:a="http://schemas.openxmlformats.org/drawingml/2006/main" xmlns:p="http://schemas.openxmlformats.org/presentationml/2006/main" xmlns:r="http://schemas.openxmlformats.org/officeDocument/2006/relationships">
+  <p:cSld>
+    <p:spTree>
+      <p:nvGrpSpPr>
+        <p:cNvPr id="1" name=""/>
+        <p:cNvGrpSpPr/>
+        <p:nvPr/>
+      </p:nvGrpSpPr>
+      <p:grpSpPr>
+        <a:xfrm>
+          <a:off x="0" y="0"/>
+          <a:ext cx="0" cy="0"/>
+          <a:chOff x="0" y="0"/>
+          <a:chExt cx="0" cy="0"/>
+        </a:xfrm>
+      </p:grpSpPr>
+      <p:sp>
+        <p:nvSpPr>
+          <p:cNvPr id="2" name="Slide Image Placeholder 1"/>
+          <p:cNvSpPr>
+            <a:spLocks noGrp="1"/>
+          </p:cNvSpPr>
+          <p:nvPr>
+            <p:ph type="sldImg" idx="2"/>
+          </p:nvPr>
+        </p:nvSpPr>
+        <p:spPr/>
+      </p:sp>
+      <p:sp>
+        <p:nvSpPr>
+          <p:cNvPr id="3" name="Notes Placeholder 2"/>
+          <p:cNvSpPr>
+            <a:spLocks noGrp="1"/>
+          </p:cNvSpPr>
+          <p:nvPr>
+            <p:ph type="body" idx="3" sz="quarter"/>
+          </p:nvPr>
+        </p:nvSpPr>
+        <p:spPr/>
+        <p:txBody>
+          <a:bodyPr/>
+          <a:lstStyle/>
+          <a:p>
+            <a:r>
+              <a:t>RETO 6 · El termómetro emocional — 🔬 onderzoek &amp; data</a:t>
+            </a:r>
+          </a:p>
+          <a:p>
+            <a:r>
+              <a:t>OPDRACHT: Stem anoniem, maak de grafiek en beschrijf de week met estar.</a:t>
+            </a:r>
+          </a:p>
+          <a:p>
+            <a:r>
+              <a:t>DE REGEL: Alles anoniem, en elke conclusie gebruikt «estar» met een percentage of een aantal. «La clase es cansada» is fout in twee opzichten — vorm én inhoud.</a:t>
+            </a:r>
+          </a:p>
+          <a:p>
+            <a:r>
+              <a:t>VERLOOP: Cada uno vota en anónimo: ¿cómo estás hoy, del uno al cinco? | Contad y haced el gráfico en la pizarra. | Escribid tres frases con estar y una cifra. | Repetid el viernes. ¿Ha cambiado algo?</a:t>
+            </a:r>
+          </a:p>
+          <a:p>
+            <a:r>
+              <a:t>SLEUTEL: Het contrast dat de reto bewijst: «estoy» voor de stemming van vandaag, «es» alleen voor het gemiddelde als getal («la media es de 3,4»). Dat ene «es» temidden van al die «estoy»-vormen maakt de regel zichtbaar.  ||  «Está mejor que el lunes» introduceert de comparativo, die verderop in C6 terugkomt — een vooruitwijzing zonder er les van te maken.  ||  Toets de drie zinnen, niet het gemiddelde. En herhaal de meting: pas de tweéde keer zien leerlingen dat een klas een stemming heeft die verandert.</a:t>
+            </a:r>
+          </a:p>
+          <a:p>
+            <a:r>
+              <a:t>NOTA: Houd het anoniem en vraag nooit door. Wie zich slecht voelt, mag dat aangeven zonder dat er een gesprek volgt — dat is de afspraak die de reto veilig maakt.</a:t>
+            </a:r>
+          </a:p>
+        </p:txBody>
+      </p:sp>
+    </p:spTree>
+  </p:cSld>
+  <p:clrMapOvr>
+    <a:masterClrMapping/>
+  </p:clrMapOvr>
+</p:notes>
+</file>
+
+<file path=ppt/notesSlides/notesSlide26.xml><?xml version="1.0" encoding="utf-8"?>
+<p:notes xmlns:a="http://schemas.openxmlformats.org/drawingml/2006/main" xmlns:p="http://schemas.openxmlformats.org/presentationml/2006/main" xmlns:r="http://schemas.openxmlformats.org/officeDocument/2006/relationships">
+  <p:cSld>
+    <p:spTree>
+      <p:nvGrpSpPr>
+        <p:cNvPr id="1" name=""/>
+        <p:cNvGrpSpPr/>
+        <p:nvPr/>
+      </p:nvGrpSpPr>
+      <p:grpSpPr>
+        <a:xfrm>
+          <a:off x="0" y="0"/>
+          <a:ext cx="0" cy="0"/>
+          <a:chOff x="0" y="0"/>
+          <a:chExt cx="0" cy="0"/>
+        </a:xfrm>
+      </p:grpSpPr>
+      <p:sp>
+        <p:nvSpPr>
+          <p:cNvPr id="2" name="Slide Image Placeholder 1"/>
+          <p:cNvSpPr>
+            <a:spLocks noGrp="1"/>
+          </p:cNvSpPr>
+          <p:nvPr>
+            <p:ph type="sldImg" idx="2"/>
+          </p:nvPr>
+        </p:nvSpPr>
+        <p:spPr/>
+      </p:sp>
+      <p:sp>
+        <p:nvSpPr>
+          <p:cNvPr id="3" name="Notes Placeholder 2"/>
+          <p:cNvSpPr>
+            <a:spLocks noGrp="1"/>
+          </p:cNvSpPr>
+          <p:nvPr>
+            <p:ph type="body" idx="3" sz="quarter"/>
+          </p:nvPr>
+        </p:nvSpPr>
+        <p:spPr/>
+        <p:txBody>
+          <a:bodyPr/>
+          <a:lstStyle/>
+          <a:p>
+            <a:r>
+              <a:t>RETO 7 · Rutinas extremas — 🎭 simulatie met beperking</a:t>
+            </a:r>
+          </a:p>
+          <a:p>
+            <a:r>
+              <a:t>OPDRACHT: Vergelijk een extreme routine met de jouwe en zeg wat jou onmogelijk lijkt.</a:t>
+            </a:r>
+          </a:p>
+          <a:p>
+            <a:r>
+              <a:t>DE REGEL: Elke vergelijking noemt twee uren: het zijne en het jouwe. «Se levanta muy temprano» telt niet; «se levanta a las cuatro y yo a las siete» wel.</a:t>
+            </a:r>
+          </a:p>
+          <a:p>
+            <a:r>
+              <a:t>VERLOOP: Elegid una rutina extrema. | Comparad hora por hora con la vuestra. | Decid qué os parece imposible y por qué. | ¿Podéis vivir así una semana? Votad.</a:t>
+            </a:r>
+          </a:p>
+          <a:p>
+            <a:r>
+              <a:t>SLEUTEL: De astronaut is de leukste maar de zwemmer is didactisch de beste: zijn dag botst het hardst met een schooldag, dus de vergelijkingen komen vanzelf.  ||  «Mientras» plus presente is de conector die de reto binnenhaalt: twee handelingen op hetzelfde moment, twee verschillende personen.  ||  De vorm die op de tong ligt («yo no podría») is condicional en hoort niet in dit leerplan. Daarom geeft het marco «yo no puedo»; «para mí es imposible» werkt even goed.</a:t>
+            </a:r>
+          </a:p>
+          <a:p>
+            <a:r>
+              <a:t>NOTA: De zestien zonsopgangen per dag in het ruimtestation zorgen altijd voor discussie. Laat die even lopen: het is echte inhoud, in het Spaans.</a:t>
+            </a:r>
+          </a:p>
+        </p:txBody>
       </p:sp>
     </p:spTree>
   </p:cSld>
@@ -37921,6 +38173,4185 @@
                 <a:latin typeface="Inter"/>
               </a:rPr>
               <a:t>23</a:t>
+            </a:r>
+          </a:p>
+        </p:txBody>
+      </p:sp>
+    </p:spTree>
+  </p:cSld>
+  <p:clrMapOvr>
+    <a:masterClrMapping/>
+  </p:clrMapOvr>
+</p:sld>
+</file>
+
+<file path=ppt/slides/slide24.xml><?xml version="1.0" encoding="utf-8"?>
+<p:sld xmlns:a="http://schemas.openxmlformats.org/drawingml/2006/main" xmlns:p="http://schemas.openxmlformats.org/presentationml/2006/main" xmlns:r="http://schemas.openxmlformats.org/officeDocument/2006/relationships">
+  <p:cSld>
+    <p:spTree>
+      <p:nvGrpSpPr>
+        <p:cNvPr id="1" name=""/>
+        <p:cNvGrpSpPr/>
+        <p:nvPr/>
+      </p:nvGrpSpPr>
+      <p:grpSpPr/>
+      <p:sp>
+        <p:nvSpPr>
+          <p:cNvPr id="2" name="Fondo"/>
+          <p:cNvSpPr/>
+          <p:nvPr/>
+        </p:nvSpPr>
+        <p:spPr>
+          <a:xfrm>
+            <a:off x="0" y="0"/>
+            <a:ext cx="12191695" cy="6858000"/>
+          </a:xfrm>
+          <a:prstGeom prst="rect">
+            <a:avLst/>
+          </a:prstGeom>
+          <a:solidFill>
+            <a:srgbClr val="FCFBF8"/>
+          </a:solidFill>
+          <a:ln>
+            <a:noFill/>
+          </a:ln>
+          <a:effectLst/>
+        </p:spPr>
+        <p:style>
+          <a:lnRef idx="1">
+            <a:schemeClr val="accent1"/>
+          </a:lnRef>
+          <a:fillRef idx="3">
+            <a:schemeClr val="accent1"/>
+          </a:fillRef>
+          <a:effectRef idx="2">
+            <a:schemeClr val="accent1"/>
+          </a:effectRef>
+          <a:fontRef idx="minor">
+            <a:schemeClr val="lt1"/>
+          </a:fontRef>
+        </p:style>
+        <p:txBody>
+          <a:bodyPr rtlCol="0" anchor="ctr"/>
+          <a:lstStyle/>
+          <a:p/>
+        </p:txBody>
+      </p:sp>
+      <p:sp>
+        <p:nvSpPr>
+          <p:cNvPr id="3" name="Cabecera"/>
+          <p:cNvSpPr/>
+          <p:nvPr/>
+        </p:nvSpPr>
+        <p:spPr>
+          <a:xfrm>
+            <a:off x="0" y="0"/>
+            <a:ext cx="12191695" cy="1078992"/>
+          </a:xfrm>
+          <a:prstGeom prst="rect">
+            <a:avLst/>
+          </a:prstGeom>
+          <a:solidFill>
+            <a:srgbClr val="7C56A9"/>
+          </a:solidFill>
+          <a:ln>
+            <a:noFill/>
+          </a:ln>
+          <a:effectLst/>
+        </p:spPr>
+        <p:style>
+          <a:lnRef idx="1">
+            <a:schemeClr val="accent1"/>
+          </a:lnRef>
+          <a:fillRef idx="3">
+            <a:schemeClr val="accent1"/>
+          </a:fillRef>
+          <a:effectRef idx="2">
+            <a:schemeClr val="accent1"/>
+          </a:effectRef>
+          <a:fontRef idx="minor">
+            <a:schemeClr val="lt1"/>
+          </a:fontRef>
+        </p:style>
+        <p:txBody>
+          <a:bodyPr rtlCol="0" anchor="ctr"/>
+          <a:lstStyle/>
+          <a:p/>
+        </p:txBody>
+      </p:sp>
+      <p:sp>
+        <p:nvSpPr>
+          <p:cNvPr id="4" name="Chip"/>
+          <p:cNvSpPr/>
+          <p:nvPr/>
+        </p:nvSpPr>
+        <p:spPr>
+          <a:xfrm>
+            <a:off x="457200" y="182880"/>
+            <a:ext cx="3017520" cy="292608"/>
+          </a:xfrm>
+          <a:prstGeom prst="roundRect">
+            <a:avLst>
+              <a:gd name="adj" fmla="val 50000"/>
+            </a:avLst>
+          </a:prstGeom>
+          <a:solidFill>
+            <a:srgbClr val="FFFFFF"/>
+          </a:solidFill>
+          <a:ln>
+            <a:noFill/>
+          </a:ln>
+          <a:effectLst/>
+        </p:spPr>
+        <p:style>
+          <a:lnRef idx="1">
+            <a:schemeClr val="accent1"/>
+          </a:lnRef>
+          <a:fillRef idx="3">
+            <a:schemeClr val="accent1"/>
+          </a:fillRef>
+          <a:effectRef idx="2">
+            <a:schemeClr val="accent1"/>
+          </a:effectRef>
+          <a:fontRef idx="minor">
+            <a:schemeClr val="lt1"/>
+          </a:fontRef>
+        </p:style>
+        <p:txBody>
+          <a:bodyPr rtlCol="0" anchor="ctr"/>
+          <a:lstStyle/>
+          <a:p/>
+        </p:txBody>
+      </p:sp>
+      <p:sp>
+        <p:nvSpPr>
+          <p:cNvPr id="5" name="ChipTxt"/>
+          <p:cNvSpPr txBox="1"/>
+          <p:nvPr/>
+        </p:nvSpPr>
+        <p:spPr>
+          <a:xfrm>
+            <a:off x="457200" y="173736"/>
+            <a:ext cx="3017520" cy="310896"/>
+          </a:xfrm>
+          <a:prstGeom prst="rect">
+            <a:avLst/>
+          </a:prstGeom>
+          <a:noFill/>
+        </p:spPr>
+        <p:txBody>
+          <a:bodyPr wrap="square" anchor="ctr" lIns="45720" rIns="45720" tIns="27432" bIns="27432">
+            <a:normAutofit/>
+          </a:bodyPr>
+          <a:lstStyle/>
+          <a:p>
+            <a:pPr algn="ctr"/>
+            <a:r>
+              <a:rPr sz="950" b="1">
+                <a:solidFill>
+                  <a:srgbClr val="5B3E83"/>
+                </a:solidFill>
+                <a:latin typeface="Inter"/>
+              </a:rPr>
+              <a:t>RETO 4 · ONDERHANDELING &amp; DILEMMA</a:t>
+            </a:r>
+          </a:p>
+        </p:txBody>
+      </p:sp>
+      <p:sp>
+        <p:nvSpPr>
+          <p:cNvPr id="6" name="Titulo"/>
+          <p:cNvSpPr txBox="1"/>
+          <p:nvPr/>
+        </p:nvSpPr>
+        <p:spPr>
+          <a:xfrm>
+            <a:off x="457200" y="502920"/>
+            <a:ext cx="8412480" cy="475488"/>
+          </a:xfrm>
+          <a:prstGeom prst="rect">
+            <a:avLst/>
+          </a:prstGeom>
+          <a:noFill/>
+        </p:spPr>
+        <p:txBody>
+          <a:bodyPr wrap="square" anchor="t" lIns="45720" rIns="45720" tIns="27432" bIns="27432">
+            <a:normAutofit/>
+          </a:bodyPr>
+          <a:lstStyle/>
+          <a:p>
+            <a:pPr algn="l"/>
+            <a:r>
+              <a:rPr sz="2700" b="1">
+                <a:solidFill>
+                  <a:srgbClr val="FFFFFF"/>
+                </a:solidFill>
+                <a:latin typeface="Bricolage Grotesque"/>
+              </a:rPr>
+              <a:t>Terapia de compañeros de piso</a:t>
+            </a:r>
+          </a:p>
+        </p:txBody>
+      </p:sp>
+      <p:sp>
+        <p:nvSpPr>
+          <p:cNvPr id="7" name="Badges"/>
+          <p:cNvSpPr txBox="1"/>
+          <p:nvPr/>
+        </p:nvSpPr>
+        <p:spPr>
+          <a:xfrm>
+            <a:off x="9052560" y="256032"/>
+            <a:ext cx="2651760" cy="640080"/>
+          </a:xfrm>
+          <a:prstGeom prst="rect">
+            <a:avLst/>
+          </a:prstGeom>
+          <a:noFill/>
+        </p:spPr>
+        <p:txBody>
+          <a:bodyPr wrap="square" anchor="t" lIns="45720" rIns="45720" tIns="27432" bIns="27432">
+            <a:normAutofit/>
+          </a:bodyPr>
+          <a:lstStyle/>
+          <a:p>
+            <a:pPr algn="r"/>
+            <a:r>
+              <a:rPr sz="1000">
+                <a:solidFill>
+                  <a:srgbClr val="EEE8F5"/>
+                </a:solidFill>
+                <a:latin typeface="Inter"/>
+              </a:rPr>
+              <a:t>👨‍👩‍👧 En grupos</a:t>
+            </a:r>
+          </a:p>
+          <a:p>
+            <a:pPr algn="r"/>
+            <a:r>
+              <a:rPr sz="1000">
+                <a:solidFill>
+                  <a:srgbClr val="EEE8F5"/>
+                </a:solidFill>
+                <a:latin typeface="Inter"/>
+              </a:rPr>
+              <a:t>± 18 min · ★★★</a:t>
+            </a:r>
+          </a:p>
+        </p:txBody>
+      </p:sp>
+      <p:sp>
+        <p:nvSpPr>
+          <p:cNvPr id="8" name="Gancho"/>
+          <p:cNvSpPr txBox="1"/>
+          <p:nvPr/>
+        </p:nvSpPr>
+        <p:spPr>
+          <a:xfrm>
+            <a:off x="457200" y="1225296"/>
+            <a:ext cx="11274552" cy="566928"/>
+          </a:xfrm>
+          <a:prstGeom prst="rect">
+            <a:avLst/>
+          </a:prstGeom>
+          <a:noFill/>
+        </p:spPr>
+        <p:txBody>
+          <a:bodyPr wrap="square" anchor="t" lIns="45720" rIns="45720" tIns="27432" bIns="27432">
+            <a:normAutofit/>
+          </a:bodyPr>
+          <a:lstStyle/>
+          <a:p>
+            <a:pPr algn="l"/>
+            <a:r>
+              <a:rPr sz="1600" b="1">
+                <a:solidFill>
+                  <a:srgbClr val="5B3E83"/>
+                </a:solidFill>
+                <a:latin typeface="Bricolage Grotesque"/>
+              </a:rPr>
+              <a:t>Uno se levanta a las seis. El otro se acuesta a las tres. Viven juntos.</a:t>
+            </a:r>
+          </a:p>
+          <a:p>
+            <a:pPr algn="l"/>
+            <a:r>
+              <a:rPr sz="1100" i="1">
+                <a:solidFill>
+                  <a:srgbClr val="6A6E78"/>
+                </a:solidFill>
+                <a:latin typeface="Inter"/>
+              </a:rPr>
+              <a:t>De ene staat op om zes uur. De andere gaat slapen om drie uur. Ze wonen samen.</a:t>
+            </a:r>
+          </a:p>
+        </p:txBody>
+      </p:sp>
+      <p:sp>
+        <p:nvSpPr>
+          <p:cNvPr id="9" name="ReglaCaja"/>
+          <p:cNvSpPr/>
+          <p:nvPr/>
+        </p:nvSpPr>
+        <p:spPr>
+          <a:xfrm>
+            <a:off x="457200" y="1847088"/>
+            <a:ext cx="11274552" cy="658368"/>
+          </a:xfrm>
+          <a:prstGeom prst="roundRect">
+            <a:avLst>
+              <a:gd name="adj" fmla="val 5000"/>
+            </a:avLst>
+          </a:prstGeom>
+          <a:solidFill>
+            <a:srgbClr val="FBF3D6"/>
+          </a:solidFill>
+          <a:ln>
+            <a:noFill/>
+          </a:ln>
+          <a:effectLst/>
+        </p:spPr>
+        <p:style>
+          <a:lnRef idx="1">
+            <a:schemeClr val="accent1"/>
+          </a:lnRef>
+          <a:fillRef idx="3">
+            <a:schemeClr val="accent1"/>
+          </a:fillRef>
+          <a:effectRef idx="2">
+            <a:schemeClr val="accent1"/>
+          </a:effectRef>
+          <a:fontRef idx="minor">
+            <a:schemeClr val="lt1"/>
+          </a:fontRef>
+        </p:style>
+        <p:txBody>
+          <a:bodyPr rtlCol="0" anchor="ctr"/>
+          <a:lstStyle/>
+          <a:p/>
+        </p:txBody>
+      </p:sp>
+      <p:sp>
+        <p:nvSpPr>
+          <p:cNvPr id="10" name="ReglaTxt"/>
+          <p:cNvSpPr txBox="1"/>
+          <p:nvPr/>
+        </p:nvSpPr>
+        <p:spPr>
+          <a:xfrm>
+            <a:off x="603504" y="1883664"/>
+            <a:ext cx="10972800" cy="585216"/>
+          </a:xfrm>
+          <a:prstGeom prst="rect">
+            <a:avLst/>
+          </a:prstGeom>
+          <a:noFill/>
+        </p:spPr>
+        <p:txBody>
+          <a:bodyPr wrap="square" anchor="t" lIns="45720" rIns="45720" tIns="27432" bIns="27432">
+            <a:normAutofit/>
+          </a:bodyPr>
+          <a:lstStyle/>
+          <a:p>
+            <a:pPr algn="l"/>
+            <a:r>
+              <a:rPr sz="850" b="1">
+                <a:solidFill>
+                  <a:srgbClr val="B7860B"/>
+                </a:solidFill>
+                <a:latin typeface="Inter"/>
+              </a:rPr>
+              <a:t>LA REGLA DEL RETO</a:t>
+            </a:r>
+          </a:p>
+          <a:p>
+            <a:pPr algn="l"/>
+            <a:r>
+              <a:rPr sz="1100">
+                <a:solidFill>
+                  <a:srgbClr val="20242E"/>
+                </a:solidFill>
+                <a:latin typeface="Inter"/>
+              </a:rPr>
+              <a:t>De bemiddelaar mag pas een oplossing voorstellen nadat hij béide standpunten heeft samengevat — in de derde persoon, met reflexieve werkwoorden. Vóór die samenvatting is elk voorstel ongeldig.</a:t>
+            </a:r>
+          </a:p>
+        </p:txBody>
+      </p:sp>
+      <p:sp>
+        <p:nvSpPr>
+          <p:cNvPr id="11" name="Tarjeta 0"/>
+          <p:cNvSpPr/>
+          <p:nvPr/>
+        </p:nvSpPr>
+        <p:spPr>
+          <a:xfrm>
+            <a:off x="457200" y="2670048"/>
+            <a:ext cx="2708910" cy="1170432"/>
+          </a:xfrm>
+          <a:prstGeom prst="roundRect">
+            <a:avLst>
+              <a:gd name="adj" fmla="val 6000"/>
+            </a:avLst>
+          </a:prstGeom>
+          <a:solidFill>
+            <a:srgbClr val="FFFFFF"/>
+          </a:solidFill>
+          <a:ln w="12700">
+            <a:solidFill>
+              <a:srgbClr val="E4E3DE"/>
+            </a:solidFill>
+          </a:ln>
+          <a:effectLst/>
+        </p:spPr>
+        <p:style>
+          <a:lnRef idx="1">
+            <a:schemeClr val="accent1"/>
+          </a:lnRef>
+          <a:fillRef idx="3">
+            <a:schemeClr val="accent1"/>
+          </a:fillRef>
+          <a:effectRef idx="2">
+            <a:schemeClr val="accent1"/>
+          </a:effectRef>
+          <a:fontRef idx="minor">
+            <a:schemeClr val="lt1"/>
+          </a:fontRef>
+        </p:style>
+        <p:txBody>
+          <a:bodyPr rtlCol="0" anchor="ctr"/>
+          <a:lstStyle/>
+          <a:p/>
+        </p:txBody>
+      </p:sp>
+      <p:sp>
+        <p:nvSpPr>
+          <p:cNvPr id="12" name="TarjetaTxt 0"/>
+          <p:cNvSpPr txBox="1"/>
+          <p:nvPr/>
+        </p:nvSpPr>
+        <p:spPr>
+          <a:xfrm>
+            <a:off x="548640" y="2724912"/>
+            <a:ext cx="2526030" cy="1060704"/>
+          </a:xfrm>
+          <a:prstGeom prst="rect">
+            <a:avLst/>
+          </a:prstGeom>
+          <a:noFill/>
+        </p:spPr>
+        <p:txBody>
+          <a:bodyPr wrap="square" anchor="t" lIns="45720" rIns="45720" tIns="27432" bIns="27432">
+            <a:normAutofit/>
+          </a:bodyPr>
+          <a:lstStyle/>
+          <a:p>
+            <a:pPr algn="l"/>
+            <a:r>
+              <a:rPr sz="1100" b="1">
+                <a:solidFill>
+                  <a:srgbClr val="5B3E83"/>
+                </a:solidFill>
+                <a:latin typeface="Bricolage Grotesque"/>
+              </a:rPr>
+              <a:t>Compañero/a A</a:t>
+            </a:r>
+          </a:p>
+          <a:p>
+            <a:pPr algn="l"/>
+            <a:r>
+              <a:rPr sz="1000">
+                <a:solidFill>
+                  <a:srgbClr val="20242E"/>
+                </a:solidFill>
+                <a:latin typeface="Inter"/>
+              </a:rPr>
+              <a:t>Te levantas a las seis, te duchas con música y desayunas en la cocina. A las diez de la noche ya estás dormido/-a.</a:t>
+            </a:r>
+          </a:p>
+        </p:txBody>
+      </p:sp>
+      <p:sp>
+        <p:nvSpPr>
+          <p:cNvPr id="13" name="Tarjeta 1"/>
+          <p:cNvSpPr/>
+          <p:nvPr/>
+        </p:nvSpPr>
+        <p:spPr>
+          <a:xfrm>
+            <a:off x="3312414" y="2670048"/>
+            <a:ext cx="2708910" cy="1170432"/>
+          </a:xfrm>
+          <a:prstGeom prst="roundRect">
+            <a:avLst>
+              <a:gd name="adj" fmla="val 6000"/>
+            </a:avLst>
+          </a:prstGeom>
+          <a:solidFill>
+            <a:srgbClr val="FFFFFF"/>
+          </a:solidFill>
+          <a:ln w="12700">
+            <a:solidFill>
+              <a:srgbClr val="E4E3DE"/>
+            </a:solidFill>
+          </a:ln>
+          <a:effectLst/>
+        </p:spPr>
+        <p:style>
+          <a:lnRef idx="1">
+            <a:schemeClr val="accent1"/>
+          </a:lnRef>
+          <a:fillRef idx="3">
+            <a:schemeClr val="accent1"/>
+          </a:fillRef>
+          <a:effectRef idx="2">
+            <a:schemeClr val="accent1"/>
+          </a:effectRef>
+          <a:fontRef idx="minor">
+            <a:schemeClr val="lt1"/>
+          </a:fontRef>
+        </p:style>
+        <p:txBody>
+          <a:bodyPr rtlCol="0" anchor="ctr"/>
+          <a:lstStyle/>
+          <a:p/>
+        </p:txBody>
+      </p:sp>
+      <p:sp>
+        <p:nvSpPr>
+          <p:cNvPr id="14" name="TarjetaTxt 1"/>
+          <p:cNvSpPr txBox="1"/>
+          <p:nvPr/>
+        </p:nvSpPr>
+        <p:spPr>
+          <a:xfrm>
+            <a:off x="3403854" y="2724912"/>
+            <a:ext cx="2526030" cy="1060704"/>
+          </a:xfrm>
+          <a:prstGeom prst="rect">
+            <a:avLst/>
+          </a:prstGeom>
+          <a:noFill/>
+        </p:spPr>
+        <p:txBody>
+          <a:bodyPr wrap="square" anchor="t" lIns="45720" rIns="45720" tIns="27432" bIns="27432">
+            <a:normAutofit/>
+          </a:bodyPr>
+          <a:lstStyle/>
+          <a:p>
+            <a:pPr algn="l"/>
+            <a:r>
+              <a:rPr sz="1100" b="1">
+                <a:solidFill>
+                  <a:srgbClr val="5B3E83"/>
+                </a:solidFill>
+                <a:latin typeface="Bricolage Grotesque"/>
+              </a:rPr>
+              <a:t>Compañero/a B</a:t>
+            </a:r>
+          </a:p>
+          <a:p>
+            <a:pPr algn="l"/>
+            <a:r>
+              <a:rPr sz="1000">
+                <a:solidFill>
+                  <a:srgbClr val="20242E"/>
+                </a:solidFill>
+                <a:latin typeface="Inter"/>
+              </a:rPr>
+              <a:t>Te acuestas a las tres, te levantas a mediodía y estudias de noche. La ducha de las seis te despierta cada día.</a:t>
+            </a:r>
+          </a:p>
+        </p:txBody>
+      </p:sp>
+      <p:sp>
+        <p:nvSpPr>
+          <p:cNvPr id="15" name="Tarjeta 2"/>
+          <p:cNvSpPr/>
+          <p:nvPr/>
+        </p:nvSpPr>
+        <p:spPr>
+          <a:xfrm>
+            <a:off x="6167628" y="2670048"/>
+            <a:ext cx="2708910" cy="1170432"/>
+          </a:xfrm>
+          <a:prstGeom prst="roundRect">
+            <a:avLst>
+              <a:gd name="adj" fmla="val 6000"/>
+            </a:avLst>
+          </a:prstGeom>
+          <a:solidFill>
+            <a:srgbClr val="FFFFFF"/>
+          </a:solidFill>
+          <a:ln w="12700">
+            <a:solidFill>
+              <a:srgbClr val="E4E3DE"/>
+            </a:solidFill>
+          </a:ln>
+          <a:effectLst/>
+        </p:spPr>
+        <p:style>
+          <a:lnRef idx="1">
+            <a:schemeClr val="accent1"/>
+          </a:lnRef>
+          <a:fillRef idx="3">
+            <a:schemeClr val="accent1"/>
+          </a:fillRef>
+          <a:effectRef idx="2">
+            <a:schemeClr val="accent1"/>
+          </a:effectRef>
+          <a:fontRef idx="minor">
+            <a:schemeClr val="lt1"/>
+          </a:fontRef>
+        </p:style>
+        <p:txBody>
+          <a:bodyPr rtlCol="0" anchor="ctr"/>
+          <a:lstStyle/>
+          <a:p/>
+        </p:txBody>
+      </p:sp>
+      <p:sp>
+        <p:nvSpPr>
+          <p:cNvPr id="16" name="TarjetaTxt 2"/>
+          <p:cNvSpPr txBox="1"/>
+          <p:nvPr/>
+        </p:nvSpPr>
+        <p:spPr>
+          <a:xfrm>
+            <a:off x="6259068" y="2724912"/>
+            <a:ext cx="2526030" cy="1060704"/>
+          </a:xfrm>
+          <a:prstGeom prst="rect">
+            <a:avLst/>
+          </a:prstGeom>
+          <a:noFill/>
+        </p:spPr>
+        <p:txBody>
+          <a:bodyPr wrap="square" anchor="t" lIns="45720" rIns="45720" tIns="27432" bIns="27432">
+            <a:normAutofit/>
+          </a:bodyPr>
+          <a:lstStyle/>
+          <a:p>
+            <a:pPr algn="l"/>
+            <a:r>
+              <a:rPr sz="1100" b="1">
+                <a:solidFill>
+                  <a:srgbClr val="5B3E83"/>
+                </a:solidFill>
+                <a:latin typeface="Bricolage Grotesque"/>
+              </a:rPr>
+              <a:t>Mediador/-a</a:t>
+            </a:r>
+          </a:p>
+          <a:p>
+            <a:pPr algn="l"/>
+            <a:r>
+              <a:rPr sz="1000">
+                <a:solidFill>
+                  <a:srgbClr val="20242E"/>
+                </a:solidFill>
+                <a:latin typeface="Inter"/>
+              </a:rPr>
+              <a:t>No tomas partido. Resumes primero, propones después.</a:t>
+            </a:r>
+          </a:p>
+        </p:txBody>
+      </p:sp>
+      <p:sp>
+        <p:nvSpPr>
+          <p:cNvPr id="17" name="Tarjeta 3"/>
+          <p:cNvSpPr/>
+          <p:nvPr/>
+        </p:nvSpPr>
+        <p:spPr>
+          <a:xfrm>
+            <a:off x="9022842" y="2670048"/>
+            <a:ext cx="2708910" cy="1170432"/>
+          </a:xfrm>
+          <a:prstGeom prst="roundRect">
+            <a:avLst>
+              <a:gd name="adj" fmla="val 6000"/>
+            </a:avLst>
+          </a:prstGeom>
+          <a:solidFill>
+            <a:srgbClr val="FFFFFF"/>
+          </a:solidFill>
+          <a:ln w="12700">
+            <a:solidFill>
+              <a:srgbClr val="E4E3DE"/>
+            </a:solidFill>
+          </a:ln>
+          <a:effectLst/>
+        </p:spPr>
+        <p:style>
+          <a:lnRef idx="1">
+            <a:schemeClr val="accent1"/>
+          </a:lnRef>
+          <a:fillRef idx="3">
+            <a:schemeClr val="accent1"/>
+          </a:fillRef>
+          <a:effectRef idx="2">
+            <a:schemeClr val="accent1"/>
+          </a:effectRef>
+          <a:fontRef idx="minor">
+            <a:schemeClr val="lt1"/>
+          </a:fontRef>
+        </p:style>
+        <p:txBody>
+          <a:bodyPr rtlCol="0" anchor="ctr"/>
+          <a:lstStyle/>
+          <a:p/>
+        </p:txBody>
+      </p:sp>
+      <p:sp>
+        <p:nvSpPr>
+          <p:cNvPr id="18" name="TarjetaTxt 3"/>
+          <p:cNvSpPr txBox="1"/>
+          <p:nvPr/>
+        </p:nvSpPr>
+        <p:spPr>
+          <a:xfrm>
+            <a:off x="9114282" y="2724912"/>
+            <a:ext cx="2526030" cy="1060704"/>
+          </a:xfrm>
+          <a:prstGeom prst="rect">
+            <a:avLst/>
+          </a:prstGeom>
+          <a:noFill/>
+        </p:spPr>
+        <p:txBody>
+          <a:bodyPr wrap="square" anchor="t" lIns="45720" rIns="45720" tIns="27432" bIns="27432">
+            <a:normAutofit/>
+          </a:bodyPr>
+          <a:lstStyle/>
+          <a:p>
+            <a:pPr algn="l"/>
+            <a:r>
+              <a:rPr sz="1100" b="1">
+                <a:solidFill>
+                  <a:srgbClr val="5B3E83"/>
+                </a:solidFill>
+                <a:latin typeface="Bricolage Grotesque"/>
+              </a:rPr>
+              <a:t>la queja</a:t>
+            </a:r>
+          </a:p>
+          <a:p>
+            <a:pPr algn="l"/>
+            <a:r>
+              <a:rPr sz="1000">
+                <a:solidFill>
+                  <a:srgbClr val="20242E"/>
+                </a:solidFill>
+                <a:latin typeface="Inter"/>
+              </a:rPr>
+              <a:t>La ducha de las seis se oye en toda la casa.</a:t>
+            </a:r>
+          </a:p>
+        </p:txBody>
+      </p:sp>
+      <p:sp>
+        <p:nvSpPr>
+          <p:cNvPr id="19" name="Tarjeta 4"/>
+          <p:cNvSpPr/>
+          <p:nvPr/>
+        </p:nvSpPr>
+        <p:spPr>
+          <a:xfrm>
+            <a:off x="457200" y="3968496"/>
+            <a:ext cx="2708910" cy="1170432"/>
+          </a:xfrm>
+          <a:prstGeom prst="roundRect">
+            <a:avLst>
+              <a:gd name="adj" fmla="val 6000"/>
+            </a:avLst>
+          </a:prstGeom>
+          <a:solidFill>
+            <a:srgbClr val="FFFFFF"/>
+          </a:solidFill>
+          <a:ln w="12700">
+            <a:solidFill>
+              <a:srgbClr val="E4E3DE"/>
+            </a:solidFill>
+          </a:ln>
+          <a:effectLst/>
+        </p:spPr>
+        <p:style>
+          <a:lnRef idx="1">
+            <a:schemeClr val="accent1"/>
+          </a:lnRef>
+          <a:fillRef idx="3">
+            <a:schemeClr val="accent1"/>
+          </a:fillRef>
+          <a:effectRef idx="2">
+            <a:schemeClr val="accent1"/>
+          </a:effectRef>
+          <a:fontRef idx="minor">
+            <a:schemeClr val="lt1"/>
+          </a:fontRef>
+        </p:style>
+        <p:txBody>
+          <a:bodyPr rtlCol="0" anchor="ctr"/>
+          <a:lstStyle/>
+          <a:p/>
+        </p:txBody>
+      </p:sp>
+      <p:sp>
+        <p:nvSpPr>
+          <p:cNvPr id="20" name="TarjetaTxt 4"/>
+          <p:cNvSpPr txBox="1"/>
+          <p:nvPr/>
+        </p:nvSpPr>
+        <p:spPr>
+          <a:xfrm>
+            <a:off x="548640" y="4023360"/>
+            <a:ext cx="2526030" cy="1060704"/>
+          </a:xfrm>
+          <a:prstGeom prst="rect">
+            <a:avLst/>
+          </a:prstGeom>
+          <a:noFill/>
+        </p:spPr>
+        <p:txBody>
+          <a:bodyPr wrap="square" anchor="t" lIns="45720" rIns="45720" tIns="27432" bIns="27432">
+            <a:normAutofit/>
+          </a:bodyPr>
+          <a:lstStyle/>
+          <a:p>
+            <a:pPr algn="l"/>
+            <a:r>
+              <a:rPr sz="1100" b="1">
+                <a:solidFill>
+                  <a:srgbClr val="5B3E83"/>
+                </a:solidFill>
+                <a:latin typeface="Bricolage Grotesque"/>
+              </a:rPr>
+              <a:t>la queja</a:t>
+            </a:r>
+          </a:p>
+          <a:p>
+            <a:pPr algn="l"/>
+            <a:r>
+              <a:rPr sz="1000">
+                <a:solidFill>
+                  <a:srgbClr val="20242E"/>
+                </a:solidFill>
+                <a:latin typeface="Inter"/>
+              </a:rPr>
+              <a:t>La cocina está sucia a mediodía.</a:t>
+            </a:r>
+          </a:p>
+        </p:txBody>
+      </p:sp>
+      <p:sp>
+        <p:nvSpPr>
+          <p:cNvPr id="21" name="Tarjeta 5"/>
+          <p:cNvSpPr/>
+          <p:nvPr/>
+        </p:nvSpPr>
+        <p:spPr>
+          <a:xfrm>
+            <a:off x="3312414" y="3968496"/>
+            <a:ext cx="2708910" cy="1170432"/>
+          </a:xfrm>
+          <a:prstGeom prst="roundRect">
+            <a:avLst>
+              <a:gd name="adj" fmla="val 6000"/>
+            </a:avLst>
+          </a:prstGeom>
+          <a:solidFill>
+            <a:srgbClr val="FFFFFF"/>
+          </a:solidFill>
+          <a:ln w="12700">
+            <a:solidFill>
+              <a:srgbClr val="E4E3DE"/>
+            </a:solidFill>
+          </a:ln>
+          <a:effectLst/>
+        </p:spPr>
+        <p:style>
+          <a:lnRef idx="1">
+            <a:schemeClr val="accent1"/>
+          </a:lnRef>
+          <a:fillRef idx="3">
+            <a:schemeClr val="accent1"/>
+          </a:fillRef>
+          <a:effectRef idx="2">
+            <a:schemeClr val="accent1"/>
+          </a:effectRef>
+          <a:fontRef idx="minor">
+            <a:schemeClr val="lt1"/>
+          </a:fontRef>
+        </p:style>
+        <p:txBody>
+          <a:bodyPr rtlCol="0" anchor="ctr"/>
+          <a:lstStyle/>
+          <a:p/>
+        </p:txBody>
+      </p:sp>
+      <p:sp>
+        <p:nvSpPr>
+          <p:cNvPr id="22" name="TarjetaTxt 5"/>
+          <p:cNvSpPr txBox="1"/>
+          <p:nvPr/>
+        </p:nvSpPr>
+        <p:spPr>
+          <a:xfrm>
+            <a:off x="3403854" y="4023360"/>
+            <a:ext cx="2526030" cy="1060704"/>
+          </a:xfrm>
+          <a:prstGeom prst="rect">
+            <a:avLst/>
+          </a:prstGeom>
+          <a:noFill/>
+        </p:spPr>
+        <p:txBody>
+          <a:bodyPr wrap="square" anchor="t" lIns="45720" rIns="45720" tIns="27432" bIns="27432">
+            <a:normAutofit/>
+          </a:bodyPr>
+          <a:lstStyle/>
+          <a:p>
+            <a:pPr algn="l"/>
+            <a:r>
+              <a:rPr sz="1100" b="1">
+                <a:solidFill>
+                  <a:srgbClr val="5B3E83"/>
+                </a:solidFill>
+                <a:latin typeface="Bricolage Grotesque"/>
+              </a:rPr>
+              <a:t>la queja</a:t>
+            </a:r>
+          </a:p>
+          <a:p>
+            <a:pPr algn="l"/>
+            <a:r>
+              <a:rPr sz="1000">
+                <a:solidFill>
+                  <a:srgbClr val="20242E"/>
+                </a:solidFill>
+                <a:latin typeface="Inter"/>
+              </a:rPr>
+              <a:t>La luz del salón está encendida a las dos de la mañana.</a:t>
+            </a:r>
+          </a:p>
+        </p:txBody>
+      </p:sp>
+      <p:sp>
+        <p:nvSpPr>
+          <p:cNvPr id="23" name="Tarjeta 6"/>
+          <p:cNvSpPr/>
+          <p:nvPr/>
+        </p:nvSpPr>
+        <p:spPr>
+          <a:xfrm>
+            <a:off x="6167628" y="3968496"/>
+            <a:ext cx="2708910" cy="1170432"/>
+          </a:xfrm>
+          <a:prstGeom prst="roundRect">
+            <a:avLst>
+              <a:gd name="adj" fmla="val 6000"/>
+            </a:avLst>
+          </a:prstGeom>
+          <a:solidFill>
+            <a:srgbClr val="FFFFFF"/>
+          </a:solidFill>
+          <a:ln w="12700">
+            <a:solidFill>
+              <a:srgbClr val="E4E3DE"/>
+            </a:solidFill>
+          </a:ln>
+          <a:effectLst/>
+        </p:spPr>
+        <p:style>
+          <a:lnRef idx="1">
+            <a:schemeClr val="accent1"/>
+          </a:lnRef>
+          <a:fillRef idx="3">
+            <a:schemeClr val="accent1"/>
+          </a:fillRef>
+          <a:effectRef idx="2">
+            <a:schemeClr val="accent1"/>
+          </a:effectRef>
+          <a:fontRef idx="minor">
+            <a:schemeClr val="lt1"/>
+          </a:fontRef>
+        </p:style>
+        <p:txBody>
+          <a:bodyPr rtlCol="0" anchor="ctr"/>
+          <a:lstStyle/>
+          <a:p/>
+        </p:txBody>
+      </p:sp>
+      <p:sp>
+        <p:nvSpPr>
+          <p:cNvPr id="24" name="TarjetaTxt 6"/>
+          <p:cNvSpPr txBox="1"/>
+          <p:nvPr/>
+        </p:nvSpPr>
+        <p:spPr>
+          <a:xfrm>
+            <a:off x="6259068" y="4023360"/>
+            <a:ext cx="2526030" cy="1060704"/>
+          </a:xfrm>
+          <a:prstGeom prst="rect">
+            <a:avLst/>
+          </a:prstGeom>
+          <a:noFill/>
+        </p:spPr>
+        <p:txBody>
+          <a:bodyPr wrap="square" anchor="t" lIns="45720" rIns="45720" tIns="27432" bIns="27432">
+            <a:normAutofit/>
+          </a:bodyPr>
+          <a:lstStyle/>
+          <a:p>
+            <a:pPr algn="l"/>
+            <a:r>
+              <a:rPr sz="1100" b="1">
+                <a:solidFill>
+                  <a:srgbClr val="5B3E83"/>
+                </a:solidFill>
+                <a:latin typeface="Bricolage Grotesque"/>
+              </a:rPr>
+              <a:t>la queja</a:t>
+            </a:r>
+          </a:p>
+          <a:p>
+            <a:pPr algn="l"/>
+            <a:r>
+              <a:rPr sz="1000">
+                <a:solidFill>
+                  <a:srgbClr val="20242E"/>
+                </a:solidFill>
+                <a:latin typeface="Inter"/>
+              </a:rPr>
+              <a:t>Nadie se acuerda de sacar la basura.</a:t>
+            </a:r>
+          </a:p>
+        </p:txBody>
+      </p:sp>
+      <p:sp>
+        <p:nvSpPr>
+          <p:cNvPr id="25" name="Tarjeta 7"/>
+          <p:cNvSpPr/>
+          <p:nvPr/>
+        </p:nvSpPr>
+        <p:spPr>
+          <a:xfrm>
+            <a:off x="9022842" y="3968496"/>
+            <a:ext cx="2708910" cy="1170432"/>
+          </a:xfrm>
+          <a:prstGeom prst="roundRect">
+            <a:avLst>
+              <a:gd name="adj" fmla="val 6000"/>
+            </a:avLst>
+          </a:prstGeom>
+          <a:solidFill>
+            <a:srgbClr val="FFFFFF"/>
+          </a:solidFill>
+          <a:ln w="12700">
+            <a:solidFill>
+              <a:srgbClr val="E4E3DE"/>
+            </a:solidFill>
+          </a:ln>
+          <a:effectLst/>
+        </p:spPr>
+        <p:style>
+          <a:lnRef idx="1">
+            <a:schemeClr val="accent1"/>
+          </a:lnRef>
+          <a:fillRef idx="3">
+            <a:schemeClr val="accent1"/>
+          </a:fillRef>
+          <a:effectRef idx="2">
+            <a:schemeClr val="accent1"/>
+          </a:effectRef>
+          <a:fontRef idx="minor">
+            <a:schemeClr val="lt1"/>
+          </a:fontRef>
+        </p:style>
+        <p:txBody>
+          <a:bodyPr rtlCol="0" anchor="ctr"/>
+          <a:lstStyle/>
+          <a:p/>
+        </p:txBody>
+      </p:sp>
+      <p:sp>
+        <p:nvSpPr>
+          <p:cNvPr id="26" name="TarjetaTxt 7"/>
+          <p:cNvSpPr txBox="1"/>
+          <p:nvPr/>
+        </p:nvSpPr>
+        <p:spPr>
+          <a:xfrm>
+            <a:off x="9114282" y="4023360"/>
+            <a:ext cx="2526030" cy="1060704"/>
+          </a:xfrm>
+          <a:prstGeom prst="rect">
+            <a:avLst/>
+          </a:prstGeom>
+          <a:noFill/>
+        </p:spPr>
+        <p:txBody>
+          <a:bodyPr wrap="square" anchor="t" lIns="45720" rIns="45720" tIns="27432" bIns="27432">
+            <a:normAutofit/>
+          </a:bodyPr>
+          <a:lstStyle/>
+          <a:p>
+            <a:pPr algn="l"/>
+            <a:r>
+              <a:rPr sz="1100" b="1">
+                <a:solidFill>
+                  <a:srgbClr val="5B3E83"/>
+                </a:solidFill>
+                <a:latin typeface="Bricolage Grotesque"/>
+              </a:rPr>
+              <a:t>mediador/-a</a:t>
+            </a:r>
+          </a:p>
+          <a:p>
+            <a:pPr algn="l"/>
+            <a:r>
+              <a:rPr sz="1000">
+                <a:solidFill>
+                  <a:srgbClr val="20242E"/>
+                </a:solidFill>
+                <a:latin typeface="Inter"/>
+              </a:rPr>
+              <a:t>Si te he entendido bien, tú te … a las …</a:t>
+            </a:r>
+          </a:p>
+        </p:txBody>
+      </p:sp>
+      <p:sp>
+        <p:nvSpPr>
+          <p:cNvPr id="27" name="Tarjeta 8"/>
+          <p:cNvSpPr/>
+          <p:nvPr/>
+        </p:nvSpPr>
+        <p:spPr>
+          <a:xfrm>
+            <a:off x="457200" y="5266944"/>
+            <a:ext cx="2708910" cy="1170432"/>
+          </a:xfrm>
+          <a:prstGeom prst="roundRect">
+            <a:avLst>
+              <a:gd name="adj" fmla="val 6000"/>
+            </a:avLst>
+          </a:prstGeom>
+          <a:solidFill>
+            <a:srgbClr val="FFFFFF"/>
+          </a:solidFill>
+          <a:ln w="12700">
+            <a:solidFill>
+              <a:srgbClr val="E4E3DE"/>
+            </a:solidFill>
+          </a:ln>
+          <a:effectLst/>
+        </p:spPr>
+        <p:style>
+          <a:lnRef idx="1">
+            <a:schemeClr val="accent1"/>
+          </a:lnRef>
+          <a:fillRef idx="3">
+            <a:schemeClr val="accent1"/>
+          </a:fillRef>
+          <a:effectRef idx="2">
+            <a:schemeClr val="accent1"/>
+          </a:effectRef>
+          <a:fontRef idx="minor">
+            <a:schemeClr val="lt1"/>
+          </a:fontRef>
+        </p:style>
+        <p:txBody>
+          <a:bodyPr rtlCol="0" anchor="ctr"/>
+          <a:lstStyle/>
+          <a:p/>
+        </p:txBody>
+      </p:sp>
+      <p:sp>
+        <p:nvSpPr>
+          <p:cNvPr id="28" name="TarjetaTxt 8"/>
+          <p:cNvSpPr txBox="1"/>
+          <p:nvPr/>
+        </p:nvSpPr>
+        <p:spPr>
+          <a:xfrm>
+            <a:off x="548640" y="5321808"/>
+            <a:ext cx="2526030" cy="1060704"/>
+          </a:xfrm>
+          <a:prstGeom prst="rect">
+            <a:avLst/>
+          </a:prstGeom>
+          <a:noFill/>
+        </p:spPr>
+        <p:txBody>
+          <a:bodyPr wrap="square" anchor="t" lIns="45720" rIns="45720" tIns="27432" bIns="27432">
+            <a:normAutofit/>
+          </a:bodyPr>
+          <a:lstStyle/>
+          <a:p>
+            <a:pPr algn="l"/>
+            <a:r>
+              <a:rPr sz="1100" b="1">
+                <a:solidFill>
+                  <a:srgbClr val="5B3E83"/>
+                </a:solidFill>
+                <a:latin typeface="Bricolage Grotesque"/>
+              </a:rPr>
+              <a:t>mediador/-a</a:t>
+            </a:r>
+          </a:p>
+          <a:p>
+            <a:pPr algn="l"/>
+            <a:r>
+              <a:rPr sz="1000">
+                <a:solidFill>
+                  <a:srgbClr val="20242E"/>
+                </a:solidFill>
+                <a:latin typeface="Inter"/>
+              </a:rPr>
+              <a:t>Y tú, en cambio, te … a las …</a:t>
+            </a:r>
+          </a:p>
+        </p:txBody>
+      </p:sp>
+      <p:sp>
+        <p:nvSpPr>
+          <p:cNvPr id="29" name="Tarjeta 9"/>
+          <p:cNvSpPr/>
+          <p:nvPr/>
+        </p:nvSpPr>
+        <p:spPr>
+          <a:xfrm>
+            <a:off x="3312414" y="5266944"/>
+            <a:ext cx="2708910" cy="1170432"/>
+          </a:xfrm>
+          <a:prstGeom prst="roundRect">
+            <a:avLst>
+              <a:gd name="adj" fmla="val 6000"/>
+            </a:avLst>
+          </a:prstGeom>
+          <a:solidFill>
+            <a:srgbClr val="FFFFFF"/>
+          </a:solidFill>
+          <a:ln w="12700">
+            <a:solidFill>
+              <a:srgbClr val="E4E3DE"/>
+            </a:solidFill>
+          </a:ln>
+          <a:effectLst/>
+        </p:spPr>
+        <p:style>
+          <a:lnRef idx="1">
+            <a:schemeClr val="accent1"/>
+          </a:lnRef>
+          <a:fillRef idx="3">
+            <a:schemeClr val="accent1"/>
+          </a:fillRef>
+          <a:effectRef idx="2">
+            <a:schemeClr val="accent1"/>
+          </a:effectRef>
+          <a:fontRef idx="minor">
+            <a:schemeClr val="lt1"/>
+          </a:fontRef>
+        </p:style>
+        <p:txBody>
+          <a:bodyPr rtlCol="0" anchor="ctr"/>
+          <a:lstStyle/>
+          <a:p/>
+        </p:txBody>
+      </p:sp>
+      <p:sp>
+        <p:nvSpPr>
+          <p:cNvPr id="30" name="TarjetaTxt 9"/>
+          <p:cNvSpPr txBox="1"/>
+          <p:nvPr/>
+        </p:nvSpPr>
+        <p:spPr>
+          <a:xfrm>
+            <a:off x="3403854" y="5321808"/>
+            <a:ext cx="2526030" cy="1060704"/>
+          </a:xfrm>
+          <a:prstGeom prst="rect">
+            <a:avLst/>
+          </a:prstGeom>
+          <a:noFill/>
+        </p:spPr>
+        <p:txBody>
+          <a:bodyPr wrap="square" anchor="t" lIns="45720" rIns="45720" tIns="27432" bIns="27432">
+            <a:normAutofit/>
+          </a:bodyPr>
+          <a:lstStyle/>
+          <a:p>
+            <a:pPr algn="l"/>
+            <a:r>
+              <a:rPr sz="1100" b="1">
+                <a:solidFill>
+                  <a:srgbClr val="5B3E83"/>
+                </a:solidFill>
+                <a:latin typeface="Bricolage Grotesque"/>
+              </a:rPr>
+              <a:t>mediador/-a</a:t>
+            </a:r>
+          </a:p>
+          <a:p>
+            <a:pPr algn="l"/>
+            <a:r>
+              <a:rPr sz="1000">
+                <a:solidFill>
+                  <a:srgbClr val="20242E"/>
+                </a:solidFill>
+                <a:latin typeface="Inter"/>
+              </a:rPr>
+              <a:t>Los dos tenéis razón en que …</a:t>
+            </a:r>
+          </a:p>
+        </p:txBody>
+      </p:sp>
+      <p:sp>
+        <p:nvSpPr>
+          <p:cNvPr id="31" name="Tarjeta 10"/>
+          <p:cNvSpPr/>
+          <p:nvPr/>
+        </p:nvSpPr>
+        <p:spPr>
+          <a:xfrm>
+            <a:off x="6167628" y="5266944"/>
+            <a:ext cx="2708910" cy="1170432"/>
+          </a:xfrm>
+          <a:prstGeom prst="roundRect">
+            <a:avLst>
+              <a:gd name="adj" fmla="val 6000"/>
+            </a:avLst>
+          </a:prstGeom>
+          <a:solidFill>
+            <a:srgbClr val="FFFFFF"/>
+          </a:solidFill>
+          <a:ln w="12700">
+            <a:solidFill>
+              <a:srgbClr val="E4E3DE"/>
+            </a:solidFill>
+          </a:ln>
+          <a:effectLst/>
+        </p:spPr>
+        <p:style>
+          <a:lnRef idx="1">
+            <a:schemeClr val="accent1"/>
+          </a:lnRef>
+          <a:fillRef idx="3">
+            <a:schemeClr val="accent1"/>
+          </a:fillRef>
+          <a:effectRef idx="2">
+            <a:schemeClr val="accent1"/>
+          </a:effectRef>
+          <a:fontRef idx="minor">
+            <a:schemeClr val="lt1"/>
+          </a:fontRef>
+        </p:style>
+        <p:txBody>
+          <a:bodyPr rtlCol="0" anchor="ctr"/>
+          <a:lstStyle/>
+          <a:p/>
+        </p:txBody>
+      </p:sp>
+      <p:sp>
+        <p:nvSpPr>
+          <p:cNvPr id="32" name="TarjetaTxt 10"/>
+          <p:cNvSpPr txBox="1"/>
+          <p:nvPr/>
+        </p:nvSpPr>
+        <p:spPr>
+          <a:xfrm>
+            <a:off x="6259068" y="5321808"/>
+            <a:ext cx="2526030" cy="1060704"/>
+          </a:xfrm>
+          <a:prstGeom prst="rect">
+            <a:avLst/>
+          </a:prstGeom>
+          <a:noFill/>
+        </p:spPr>
+        <p:txBody>
+          <a:bodyPr wrap="square" anchor="t" lIns="45720" rIns="45720" tIns="27432" bIns="27432">
+            <a:normAutofit/>
+          </a:bodyPr>
+          <a:lstStyle/>
+          <a:p>
+            <a:pPr algn="l"/>
+            <a:r>
+              <a:rPr sz="1100" b="1">
+                <a:solidFill>
+                  <a:srgbClr val="5B3E83"/>
+                </a:solidFill>
+                <a:latin typeface="Bricolage Grotesque"/>
+              </a:rPr>
+              <a:t>mediador/-a</a:t>
+            </a:r>
+          </a:p>
+          <a:p>
+            <a:pPr algn="l"/>
+            <a:r>
+              <a:rPr sz="1000">
+                <a:solidFill>
+                  <a:srgbClr val="20242E"/>
+                </a:solidFill>
+                <a:latin typeface="Inter"/>
+              </a:rPr>
+              <a:t>¿Qué os parece si …?</a:t>
+            </a:r>
+          </a:p>
+        </p:txBody>
+      </p:sp>
+      <p:sp>
+        <p:nvSpPr>
+          <p:cNvPr id="33" name="Tarjeta 11"/>
+          <p:cNvSpPr/>
+          <p:nvPr/>
+        </p:nvSpPr>
+        <p:spPr>
+          <a:xfrm>
+            <a:off x="9022842" y="5266944"/>
+            <a:ext cx="2708910" cy="1170432"/>
+          </a:xfrm>
+          <a:prstGeom prst="roundRect">
+            <a:avLst>
+              <a:gd name="adj" fmla="val 6000"/>
+            </a:avLst>
+          </a:prstGeom>
+          <a:solidFill>
+            <a:srgbClr val="FFFFFF"/>
+          </a:solidFill>
+          <a:ln w="12700">
+            <a:solidFill>
+              <a:srgbClr val="E4E3DE"/>
+            </a:solidFill>
+          </a:ln>
+          <a:effectLst/>
+        </p:spPr>
+        <p:style>
+          <a:lnRef idx="1">
+            <a:schemeClr val="accent1"/>
+          </a:lnRef>
+          <a:fillRef idx="3">
+            <a:schemeClr val="accent1"/>
+          </a:fillRef>
+          <a:effectRef idx="2">
+            <a:schemeClr val="accent1"/>
+          </a:effectRef>
+          <a:fontRef idx="minor">
+            <a:schemeClr val="lt1"/>
+          </a:fontRef>
+        </p:style>
+        <p:txBody>
+          <a:bodyPr rtlCol="0" anchor="ctr"/>
+          <a:lstStyle/>
+          <a:p/>
+        </p:txBody>
+      </p:sp>
+      <p:sp>
+        <p:nvSpPr>
+          <p:cNvPr id="34" name="TarjetaTxt 11"/>
+          <p:cNvSpPr txBox="1"/>
+          <p:nvPr/>
+        </p:nvSpPr>
+        <p:spPr>
+          <a:xfrm>
+            <a:off x="9114282" y="5321808"/>
+            <a:ext cx="2526030" cy="1060704"/>
+          </a:xfrm>
+          <a:prstGeom prst="rect">
+            <a:avLst/>
+          </a:prstGeom>
+          <a:noFill/>
+        </p:spPr>
+        <p:txBody>
+          <a:bodyPr wrap="square" anchor="t" lIns="45720" rIns="45720" tIns="27432" bIns="27432">
+            <a:normAutofit/>
+          </a:bodyPr>
+          <a:lstStyle/>
+          <a:p>
+            <a:pPr algn="l"/>
+            <a:r>
+              <a:rPr sz="1100" b="1">
+                <a:solidFill>
+                  <a:srgbClr val="5B3E83"/>
+                </a:solidFill>
+                <a:latin typeface="Bricolage Grotesque"/>
+              </a:rPr>
+              <a:t>mediador/-a</a:t>
+            </a:r>
+          </a:p>
+          <a:p>
+            <a:pPr algn="l"/>
+            <a:r>
+              <a:rPr sz="1000">
+                <a:solidFill>
+                  <a:srgbClr val="20242E"/>
+                </a:solidFill>
+                <a:latin typeface="Inter"/>
+              </a:rPr>
+              <a:t>¿Estáis de acuerdo con esto?</a:t>
+            </a:r>
+          </a:p>
+        </p:txBody>
+      </p:sp>
+    </p:spTree>
+  </p:cSld>
+  <p:clrMapOvr>
+    <a:masterClrMapping/>
+  </p:clrMapOvr>
+</p:sld>
+</file>
+
+<file path=ppt/slides/slide25.xml><?xml version="1.0" encoding="utf-8"?>
+<p:sld xmlns:a="http://schemas.openxmlformats.org/drawingml/2006/main" xmlns:p="http://schemas.openxmlformats.org/presentationml/2006/main" xmlns:r="http://schemas.openxmlformats.org/officeDocument/2006/relationships">
+  <p:cSld>
+    <p:spTree>
+      <p:nvGrpSpPr>
+        <p:cNvPr id="1" name=""/>
+        <p:cNvGrpSpPr/>
+        <p:nvPr/>
+      </p:nvGrpSpPr>
+      <p:grpSpPr/>
+      <p:sp>
+        <p:nvSpPr>
+          <p:cNvPr id="2" name="Fondo"/>
+          <p:cNvSpPr/>
+          <p:nvPr/>
+        </p:nvSpPr>
+        <p:spPr>
+          <a:xfrm>
+            <a:off x="0" y="0"/>
+            <a:ext cx="12191695" cy="6858000"/>
+          </a:xfrm>
+          <a:prstGeom prst="rect">
+            <a:avLst/>
+          </a:prstGeom>
+          <a:solidFill>
+            <a:srgbClr val="FCFBF8"/>
+          </a:solidFill>
+          <a:ln>
+            <a:noFill/>
+          </a:ln>
+          <a:effectLst/>
+        </p:spPr>
+        <p:style>
+          <a:lnRef idx="1">
+            <a:schemeClr val="accent1"/>
+          </a:lnRef>
+          <a:fillRef idx="3">
+            <a:schemeClr val="accent1"/>
+          </a:fillRef>
+          <a:effectRef idx="2">
+            <a:schemeClr val="accent1"/>
+          </a:effectRef>
+          <a:fontRef idx="minor">
+            <a:schemeClr val="lt1"/>
+          </a:fontRef>
+        </p:style>
+        <p:txBody>
+          <a:bodyPr rtlCol="0" anchor="ctr"/>
+          <a:lstStyle/>
+          <a:p/>
+        </p:txBody>
+      </p:sp>
+      <p:sp>
+        <p:nvSpPr>
+          <p:cNvPr id="3" name="Cabecera"/>
+          <p:cNvSpPr/>
+          <p:nvPr/>
+        </p:nvSpPr>
+        <p:spPr>
+          <a:xfrm>
+            <a:off x="0" y="0"/>
+            <a:ext cx="12191695" cy="1078992"/>
+          </a:xfrm>
+          <a:prstGeom prst="rect">
+            <a:avLst/>
+          </a:prstGeom>
+          <a:solidFill>
+            <a:srgbClr val="7C56A9"/>
+          </a:solidFill>
+          <a:ln>
+            <a:noFill/>
+          </a:ln>
+          <a:effectLst/>
+        </p:spPr>
+        <p:style>
+          <a:lnRef idx="1">
+            <a:schemeClr val="accent1"/>
+          </a:lnRef>
+          <a:fillRef idx="3">
+            <a:schemeClr val="accent1"/>
+          </a:fillRef>
+          <a:effectRef idx="2">
+            <a:schemeClr val="accent1"/>
+          </a:effectRef>
+          <a:fontRef idx="minor">
+            <a:schemeClr val="lt1"/>
+          </a:fontRef>
+        </p:style>
+        <p:txBody>
+          <a:bodyPr rtlCol="0" anchor="ctr"/>
+          <a:lstStyle/>
+          <a:p/>
+        </p:txBody>
+      </p:sp>
+      <p:sp>
+        <p:nvSpPr>
+          <p:cNvPr id="4" name="Chip"/>
+          <p:cNvSpPr/>
+          <p:nvPr/>
+        </p:nvSpPr>
+        <p:spPr>
+          <a:xfrm>
+            <a:off x="457200" y="182880"/>
+            <a:ext cx="3017520" cy="292608"/>
+          </a:xfrm>
+          <a:prstGeom prst="roundRect">
+            <a:avLst>
+              <a:gd name="adj" fmla="val 50000"/>
+            </a:avLst>
+          </a:prstGeom>
+          <a:solidFill>
+            <a:srgbClr val="FFFFFF"/>
+          </a:solidFill>
+          <a:ln>
+            <a:noFill/>
+          </a:ln>
+          <a:effectLst/>
+        </p:spPr>
+        <p:style>
+          <a:lnRef idx="1">
+            <a:schemeClr val="accent1"/>
+          </a:lnRef>
+          <a:fillRef idx="3">
+            <a:schemeClr val="accent1"/>
+          </a:fillRef>
+          <a:effectRef idx="2">
+            <a:schemeClr val="accent1"/>
+          </a:effectRef>
+          <a:fontRef idx="minor">
+            <a:schemeClr val="lt1"/>
+          </a:fontRef>
+        </p:style>
+        <p:txBody>
+          <a:bodyPr rtlCol="0" anchor="ctr"/>
+          <a:lstStyle/>
+          <a:p/>
+        </p:txBody>
+      </p:sp>
+      <p:sp>
+        <p:nvSpPr>
+          <p:cNvPr id="5" name="ChipTxt"/>
+          <p:cNvSpPr txBox="1"/>
+          <p:nvPr/>
+        </p:nvSpPr>
+        <p:spPr>
+          <a:xfrm>
+            <a:off x="457200" y="173736"/>
+            <a:ext cx="3017520" cy="310896"/>
+          </a:xfrm>
+          <a:prstGeom prst="rect">
+            <a:avLst/>
+          </a:prstGeom>
+          <a:noFill/>
+        </p:spPr>
+        <p:txBody>
+          <a:bodyPr wrap="square" anchor="ctr" lIns="45720" rIns="45720" tIns="27432" bIns="27432">
+            <a:normAutofit/>
+          </a:bodyPr>
+          <a:lstStyle/>
+          <a:p>
+            <a:pPr algn="ctr"/>
+            <a:r>
+              <a:rPr sz="950" b="1">
+                <a:solidFill>
+                  <a:srgbClr val="5B3E83"/>
+                </a:solidFill>
+                <a:latin typeface="Inter"/>
+              </a:rPr>
+              <a:t>RETO 6 · ONDERZOEK &amp; DATA</a:t>
+            </a:r>
+          </a:p>
+        </p:txBody>
+      </p:sp>
+      <p:sp>
+        <p:nvSpPr>
+          <p:cNvPr id="6" name="Titulo"/>
+          <p:cNvSpPr txBox="1"/>
+          <p:nvPr/>
+        </p:nvSpPr>
+        <p:spPr>
+          <a:xfrm>
+            <a:off x="457200" y="502920"/>
+            <a:ext cx="8412480" cy="475488"/>
+          </a:xfrm>
+          <a:prstGeom prst="rect">
+            <a:avLst/>
+          </a:prstGeom>
+          <a:noFill/>
+        </p:spPr>
+        <p:txBody>
+          <a:bodyPr wrap="square" anchor="t" lIns="45720" rIns="45720" tIns="27432" bIns="27432">
+            <a:normAutofit/>
+          </a:bodyPr>
+          <a:lstStyle/>
+          <a:p>
+            <a:pPr algn="l"/>
+            <a:r>
+              <a:rPr sz="2700" b="1">
+                <a:solidFill>
+                  <a:srgbClr val="FFFFFF"/>
+                </a:solidFill>
+                <a:latin typeface="Bricolage Grotesque"/>
+              </a:rPr>
+              <a:t>El termómetro emocional</a:t>
+            </a:r>
+          </a:p>
+        </p:txBody>
+      </p:sp>
+      <p:sp>
+        <p:nvSpPr>
+          <p:cNvPr id="7" name="Badges"/>
+          <p:cNvSpPr txBox="1"/>
+          <p:nvPr/>
+        </p:nvSpPr>
+        <p:spPr>
+          <a:xfrm>
+            <a:off x="9052560" y="256032"/>
+            <a:ext cx="2651760" cy="640080"/>
+          </a:xfrm>
+          <a:prstGeom prst="rect">
+            <a:avLst/>
+          </a:prstGeom>
+          <a:noFill/>
+        </p:spPr>
+        <p:txBody>
+          <a:bodyPr wrap="square" anchor="t" lIns="45720" rIns="45720" tIns="27432" bIns="27432">
+            <a:normAutofit/>
+          </a:bodyPr>
+          <a:lstStyle/>
+          <a:p>
+            <a:pPr algn="r"/>
+            <a:r>
+              <a:rPr sz="1000">
+                <a:solidFill>
+                  <a:srgbClr val="EEE8F5"/>
+                </a:solidFill>
+                <a:latin typeface="Inter"/>
+              </a:rPr>
+              <a:t>🏫 Toda la clase</a:t>
+            </a:r>
+          </a:p>
+          <a:p>
+            <a:pPr algn="r"/>
+            <a:r>
+              <a:rPr sz="1000">
+                <a:solidFill>
+                  <a:srgbClr val="EEE8F5"/>
+                </a:solidFill>
+                <a:latin typeface="Inter"/>
+              </a:rPr>
+              <a:t>± 15 min · ★★☆</a:t>
+            </a:r>
+          </a:p>
+        </p:txBody>
+      </p:sp>
+      <p:sp>
+        <p:nvSpPr>
+          <p:cNvPr id="8" name="Gancho"/>
+          <p:cNvSpPr txBox="1"/>
+          <p:nvPr/>
+        </p:nvSpPr>
+        <p:spPr>
+          <a:xfrm>
+            <a:off x="457200" y="1225296"/>
+            <a:ext cx="11274552" cy="566928"/>
+          </a:xfrm>
+          <a:prstGeom prst="rect">
+            <a:avLst/>
+          </a:prstGeom>
+          <a:noFill/>
+        </p:spPr>
+        <p:txBody>
+          <a:bodyPr wrap="square" anchor="t" lIns="45720" rIns="45720" tIns="27432" bIns="27432">
+            <a:normAutofit/>
+          </a:bodyPr>
+          <a:lstStyle/>
+          <a:p>
+            <a:pPr algn="l"/>
+            <a:r>
+              <a:rPr sz="1600" b="1">
+                <a:solidFill>
+                  <a:srgbClr val="5B3E83"/>
+                </a:solidFill>
+                <a:latin typeface="Bricolage Grotesque"/>
+              </a:rPr>
+              <a:t>¿Cómo está la clase hoy? En cifras, y sin nombres.</a:t>
+            </a:r>
+          </a:p>
+          <a:p>
+            <a:pPr algn="l"/>
+            <a:r>
+              <a:rPr sz="1100" i="1">
+                <a:solidFill>
+                  <a:srgbClr val="6A6E78"/>
+                </a:solidFill>
+                <a:latin typeface="Inter"/>
+              </a:rPr>
+              <a:t>Hoe is de klas er vandaag aan toe? In cijfers, en zonder namen.</a:t>
+            </a:r>
+          </a:p>
+        </p:txBody>
+      </p:sp>
+      <p:sp>
+        <p:nvSpPr>
+          <p:cNvPr id="9" name="ReglaCaja"/>
+          <p:cNvSpPr/>
+          <p:nvPr/>
+        </p:nvSpPr>
+        <p:spPr>
+          <a:xfrm>
+            <a:off x="457200" y="1847088"/>
+            <a:ext cx="11274552" cy="658368"/>
+          </a:xfrm>
+          <a:prstGeom prst="roundRect">
+            <a:avLst>
+              <a:gd name="adj" fmla="val 5000"/>
+            </a:avLst>
+          </a:prstGeom>
+          <a:solidFill>
+            <a:srgbClr val="FBF3D6"/>
+          </a:solidFill>
+          <a:ln>
+            <a:noFill/>
+          </a:ln>
+          <a:effectLst/>
+        </p:spPr>
+        <p:style>
+          <a:lnRef idx="1">
+            <a:schemeClr val="accent1"/>
+          </a:lnRef>
+          <a:fillRef idx="3">
+            <a:schemeClr val="accent1"/>
+          </a:fillRef>
+          <a:effectRef idx="2">
+            <a:schemeClr val="accent1"/>
+          </a:effectRef>
+          <a:fontRef idx="minor">
+            <a:schemeClr val="lt1"/>
+          </a:fontRef>
+        </p:style>
+        <p:txBody>
+          <a:bodyPr rtlCol="0" anchor="ctr"/>
+          <a:lstStyle/>
+          <a:p/>
+        </p:txBody>
+      </p:sp>
+      <p:sp>
+        <p:nvSpPr>
+          <p:cNvPr id="10" name="ReglaTxt"/>
+          <p:cNvSpPr txBox="1"/>
+          <p:nvPr/>
+        </p:nvSpPr>
+        <p:spPr>
+          <a:xfrm>
+            <a:off x="603504" y="1883664"/>
+            <a:ext cx="10972800" cy="585216"/>
+          </a:xfrm>
+          <a:prstGeom prst="rect">
+            <a:avLst/>
+          </a:prstGeom>
+          <a:noFill/>
+        </p:spPr>
+        <p:txBody>
+          <a:bodyPr wrap="square" anchor="t" lIns="45720" rIns="45720" tIns="27432" bIns="27432">
+            <a:normAutofit/>
+          </a:bodyPr>
+          <a:lstStyle/>
+          <a:p>
+            <a:pPr algn="l"/>
+            <a:r>
+              <a:rPr sz="850" b="1">
+                <a:solidFill>
+                  <a:srgbClr val="B7860B"/>
+                </a:solidFill>
+                <a:latin typeface="Inter"/>
+              </a:rPr>
+              <a:t>LA REGLA DEL RETO</a:t>
+            </a:r>
+          </a:p>
+          <a:p>
+            <a:pPr algn="l"/>
+            <a:r>
+              <a:rPr sz="1100">
+                <a:solidFill>
+                  <a:srgbClr val="20242E"/>
+                </a:solidFill>
+                <a:latin typeface="Inter"/>
+              </a:rPr>
+              <a:t>Alles anoniem, en elke conclusie gebruikt «estar» met een percentage of een aantal. «La clase es cansada» is fout in twee opzichten — vorm én inhoud.</a:t>
+            </a:r>
+          </a:p>
+        </p:txBody>
+      </p:sp>
+      <p:sp>
+        <p:nvSpPr>
+          <p:cNvPr id="11" name="Tarjeta 0"/>
+          <p:cNvSpPr/>
+          <p:nvPr/>
+        </p:nvSpPr>
+        <p:spPr>
+          <a:xfrm>
+            <a:off x="457200" y="2670048"/>
+            <a:ext cx="2708910" cy="1170432"/>
+          </a:xfrm>
+          <a:prstGeom prst="roundRect">
+            <a:avLst>
+              <a:gd name="adj" fmla="val 6000"/>
+            </a:avLst>
+          </a:prstGeom>
+          <a:solidFill>
+            <a:srgbClr val="FFFFFF"/>
+          </a:solidFill>
+          <a:ln w="12700">
+            <a:solidFill>
+              <a:srgbClr val="E4E3DE"/>
+            </a:solidFill>
+          </a:ln>
+          <a:effectLst/>
+        </p:spPr>
+        <p:style>
+          <a:lnRef idx="1">
+            <a:schemeClr val="accent1"/>
+          </a:lnRef>
+          <a:fillRef idx="3">
+            <a:schemeClr val="accent1"/>
+          </a:fillRef>
+          <a:effectRef idx="2">
+            <a:schemeClr val="accent1"/>
+          </a:effectRef>
+          <a:fontRef idx="minor">
+            <a:schemeClr val="lt1"/>
+          </a:fontRef>
+        </p:style>
+        <p:txBody>
+          <a:bodyPr rtlCol="0" anchor="ctr"/>
+          <a:lstStyle/>
+          <a:p/>
+        </p:txBody>
+      </p:sp>
+      <p:sp>
+        <p:nvSpPr>
+          <p:cNvPr id="12" name="TarjetaTxt 0"/>
+          <p:cNvSpPr txBox="1"/>
+          <p:nvPr/>
+        </p:nvSpPr>
+        <p:spPr>
+          <a:xfrm>
+            <a:off x="548640" y="2724912"/>
+            <a:ext cx="2526030" cy="1060704"/>
+          </a:xfrm>
+          <a:prstGeom prst="rect">
+            <a:avLst/>
+          </a:prstGeom>
+          <a:noFill/>
+        </p:spPr>
+        <p:txBody>
+          <a:bodyPr wrap="square" anchor="t" lIns="45720" rIns="45720" tIns="27432" bIns="27432">
+            <a:normAutofit/>
+          </a:bodyPr>
+          <a:lstStyle/>
+          <a:p>
+            <a:pPr algn="l"/>
+            <a:r>
+              <a:rPr sz="1100" b="1">
+                <a:solidFill>
+                  <a:srgbClr val="5B3E83"/>
+                </a:solidFill>
+                <a:latin typeface="Bricolage Grotesque"/>
+              </a:rPr>
+              <a:t>1 · fatal</a:t>
+            </a:r>
+          </a:p>
+          <a:p>
+            <a:pPr algn="l"/>
+            <a:r>
+              <a:rPr sz="1000">
+                <a:solidFill>
+                  <a:srgbClr val="20242E"/>
+                </a:solidFill>
+                <a:latin typeface="Inter"/>
+              </a:rPr>
+              <a:t>estoy fatal</a:t>
+            </a:r>
+          </a:p>
+        </p:txBody>
+      </p:sp>
+      <p:sp>
+        <p:nvSpPr>
+          <p:cNvPr id="13" name="Tarjeta 1"/>
+          <p:cNvSpPr/>
+          <p:nvPr/>
+        </p:nvSpPr>
+        <p:spPr>
+          <a:xfrm>
+            <a:off x="3312414" y="2670048"/>
+            <a:ext cx="2708910" cy="1170432"/>
+          </a:xfrm>
+          <a:prstGeom prst="roundRect">
+            <a:avLst>
+              <a:gd name="adj" fmla="val 6000"/>
+            </a:avLst>
+          </a:prstGeom>
+          <a:solidFill>
+            <a:srgbClr val="FFFFFF"/>
+          </a:solidFill>
+          <a:ln w="12700">
+            <a:solidFill>
+              <a:srgbClr val="E4E3DE"/>
+            </a:solidFill>
+          </a:ln>
+          <a:effectLst/>
+        </p:spPr>
+        <p:style>
+          <a:lnRef idx="1">
+            <a:schemeClr val="accent1"/>
+          </a:lnRef>
+          <a:fillRef idx="3">
+            <a:schemeClr val="accent1"/>
+          </a:fillRef>
+          <a:effectRef idx="2">
+            <a:schemeClr val="accent1"/>
+          </a:effectRef>
+          <a:fontRef idx="minor">
+            <a:schemeClr val="lt1"/>
+          </a:fontRef>
+        </p:style>
+        <p:txBody>
+          <a:bodyPr rtlCol="0" anchor="ctr"/>
+          <a:lstStyle/>
+          <a:p/>
+        </p:txBody>
+      </p:sp>
+      <p:sp>
+        <p:nvSpPr>
+          <p:cNvPr id="14" name="TarjetaTxt 1"/>
+          <p:cNvSpPr txBox="1"/>
+          <p:nvPr/>
+        </p:nvSpPr>
+        <p:spPr>
+          <a:xfrm>
+            <a:off x="3403854" y="2724912"/>
+            <a:ext cx="2526030" cy="1060704"/>
+          </a:xfrm>
+          <a:prstGeom prst="rect">
+            <a:avLst/>
+          </a:prstGeom>
+          <a:noFill/>
+        </p:spPr>
+        <p:txBody>
+          <a:bodyPr wrap="square" anchor="t" lIns="45720" rIns="45720" tIns="27432" bIns="27432">
+            <a:normAutofit/>
+          </a:bodyPr>
+          <a:lstStyle/>
+          <a:p>
+            <a:pPr algn="l"/>
+            <a:r>
+              <a:rPr sz="1100" b="1">
+                <a:solidFill>
+                  <a:srgbClr val="5B3E83"/>
+                </a:solidFill>
+                <a:latin typeface="Bricolage Grotesque"/>
+              </a:rPr>
+              <a:t>2 · regular</a:t>
+            </a:r>
+          </a:p>
+          <a:p>
+            <a:pPr algn="l"/>
+            <a:r>
+              <a:rPr sz="1000">
+                <a:solidFill>
+                  <a:srgbClr val="20242E"/>
+                </a:solidFill>
+                <a:latin typeface="Inter"/>
+              </a:rPr>
+              <a:t>estoy regular</a:t>
+            </a:r>
+          </a:p>
+        </p:txBody>
+      </p:sp>
+      <p:sp>
+        <p:nvSpPr>
+          <p:cNvPr id="15" name="Tarjeta 2"/>
+          <p:cNvSpPr/>
+          <p:nvPr/>
+        </p:nvSpPr>
+        <p:spPr>
+          <a:xfrm>
+            <a:off x="6167628" y="2670048"/>
+            <a:ext cx="2708910" cy="1170432"/>
+          </a:xfrm>
+          <a:prstGeom prst="roundRect">
+            <a:avLst>
+              <a:gd name="adj" fmla="val 6000"/>
+            </a:avLst>
+          </a:prstGeom>
+          <a:solidFill>
+            <a:srgbClr val="FFFFFF"/>
+          </a:solidFill>
+          <a:ln w="12700">
+            <a:solidFill>
+              <a:srgbClr val="E4E3DE"/>
+            </a:solidFill>
+          </a:ln>
+          <a:effectLst/>
+        </p:spPr>
+        <p:style>
+          <a:lnRef idx="1">
+            <a:schemeClr val="accent1"/>
+          </a:lnRef>
+          <a:fillRef idx="3">
+            <a:schemeClr val="accent1"/>
+          </a:fillRef>
+          <a:effectRef idx="2">
+            <a:schemeClr val="accent1"/>
+          </a:effectRef>
+          <a:fontRef idx="minor">
+            <a:schemeClr val="lt1"/>
+          </a:fontRef>
+        </p:style>
+        <p:txBody>
+          <a:bodyPr rtlCol="0" anchor="ctr"/>
+          <a:lstStyle/>
+          <a:p/>
+        </p:txBody>
+      </p:sp>
+      <p:sp>
+        <p:nvSpPr>
+          <p:cNvPr id="16" name="TarjetaTxt 2"/>
+          <p:cNvSpPr txBox="1"/>
+          <p:nvPr/>
+        </p:nvSpPr>
+        <p:spPr>
+          <a:xfrm>
+            <a:off x="6259068" y="2724912"/>
+            <a:ext cx="2526030" cy="1060704"/>
+          </a:xfrm>
+          <a:prstGeom prst="rect">
+            <a:avLst/>
+          </a:prstGeom>
+          <a:noFill/>
+        </p:spPr>
+        <p:txBody>
+          <a:bodyPr wrap="square" anchor="t" lIns="45720" rIns="45720" tIns="27432" bIns="27432">
+            <a:normAutofit/>
+          </a:bodyPr>
+          <a:lstStyle/>
+          <a:p>
+            <a:pPr algn="l"/>
+            <a:r>
+              <a:rPr sz="1100" b="1">
+                <a:solidFill>
+                  <a:srgbClr val="5B3E83"/>
+                </a:solidFill>
+                <a:latin typeface="Bricolage Grotesque"/>
+              </a:rPr>
+              <a:t>3 · normal</a:t>
+            </a:r>
+          </a:p>
+          <a:p>
+            <a:pPr algn="l"/>
+            <a:r>
+              <a:rPr sz="1000">
+                <a:solidFill>
+                  <a:srgbClr val="20242E"/>
+                </a:solidFill>
+                <a:latin typeface="Inter"/>
+              </a:rPr>
+              <a:t>estoy bien</a:t>
+            </a:r>
+          </a:p>
+        </p:txBody>
+      </p:sp>
+      <p:sp>
+        <p:nvSpPr>
+          <p:cNvPr id="17" name="Tarjeta 3"/>
+          <p:cNvSpPr/>
+          <p:nvPr/>
+        </p:nvSpPr>
+        <p:spPr>
+          <a:xfrm>
+            <a:off x="9022842" y="2670048"/>
+            <a:ext cx="2708910" cy="1170432"/>
+          </a:xfrm>
+          <a:prstGeom prst="roundRect">
+            <a:avLst>
+              <a:gd name="adj" fmla="val 6000"/>
+            </a:avLst>
+          </a:prstGeom>
+          <a:solidFill>
+            <a:srgbClr val="FFFFFF"/>
+          </a:solidFill>
+          <a:ln w="12700">
+            <a:solidFill>
+              <a:srgbClr val="E4E3DE"/>
+            </a:solidFill>
+          </a:ln>
+          <a:effectLst/>
+        </p:spPr>
+        <p:style>
+          <a:lnRef idx="1">
+            <a:schemeClr val="accent1"/>
+          </a:lnRef>
+          <a:fillRef idx="3">
+            <a:schemeClr val="accent1"/>
+          </a:fillRef>
+          <a:effectRef idx="2">
+            <a:schemeClr val="accent1"/>
+          </a:effectRef>
+          <a:fontRef idx="minor">
+            <a:schemeClr val="lt1"/>
+          </a:fontRef>
+        </p:style>
+        <p:txBody>
+          <a:bodyPr rtlCol="0" anchor="ctr"/>
+          <a:lstStyle/>
+          <a:p/>
+        </p:txBody>
+      </p:sp>
+      <p:sp>
+        <p:nvSpPr>
+          <p:cNvPr id="18" name="TarjetaTxt 3"/>
+          <p:cNvSpPr txBox="1"/>
+          <p:nvPr/>
+        </p:nvSpPr>
+        <p:spPr>
+          <a:xfrm>
+            <a:off x="9114282" y="2724912"/>
+            <a:ext cx="2526030" cy="1060704"/>
+          </a:xfrm>
+          <a:prstGeom prst="rect">
+            <a:avLst/>
+          </a:prstGeom>
+          <a:noFill/>
+        </p:spPr>
+        <p:txBody>
+          <a:bodyPr wrap="square" anchor="t" lIns="45720" rIns="45720" tIns="27432" bIns="27432">
+            <a:normAutofit/>
+          </a:bodyPr>
+          <a:lstStyle/>
+          <a:p>
+            <a:pPr algn="l"/>
+            <a:r>
+              <a:rPr sz="1100" b="1">
+                <a:solidFill>
+                  <a:srgbClr val="5B3E83"/>
+                </a:solidFill>
+                <a:latin typeface="Bricolage Grotesque"/>
+              </a:rPr>
+              <a:t>4 · contento/-a</a:t>
+            </a:r>
+          </a:p>
+          <a:p>
+            <a:pPr algn="l"/>
+            <a:r>
+              <a:rPr sz="1000">
+                <a:solidFill>
+                  <a:srgbClr val="20242E"/>
+                </a:solidFill>
+                <a:latin typeface="Inter"/>
+              </a:rPr>
+              <a:t>estoy contento/-a</a:t>
+            </a:r>
+          </a:p>
+        </p:txBody>
+      </p:sp>
+      <p:sp>
+        <p:nvSpPr>
+          <p:cNvPr id="19" name="Tarjeta 4"/>
+          <p:cNvSpPr/>
+          <p:nvPr/>
+        </p:nvSpPr>
+        <p:spPr>
+          <a:xfrm>
+            <a:off x="457200" y="3968496"/>
+            <a:ext cx="2708910" cy="1170432"/>
+          </a:xfrm>
+          <a:prstGeom prst="roundRect">
+            <a:avLst>
+              <a:gd name="adj" fmla="val 6000"/>
+            </a:avLst>
+          </a:prstGeom>
+          <a:solidFill>
+            <a:srgbClr val="FFFFFF"/>
+          </a:solidFill>
+          <a:ln w="12700">
+            <a:solidFill>
+              <a:srgbClr val="E4E3DE"/>
+            </a:solidFill>
+          </a:ln>
+          <a:effectLst/>
+        </p:spPr>
+        <p:style>
+          <a:lnRef idx="1">
+            <a:schemeClr val="accent1"/>
+          </a:lnRef>
+          <a:fillRef idx="3">
+            <a:schemeClr val="accent1"/>
+          </a:fillRef>
+          <a:effectRef idx="2">
+            <a:schemeClr val="accent1"/>
+          </a:effectRef>
+          <a:fontRef idx="minor">
+            <a:schemeClr val="lt1"/>
+          </a:fontRef>
+        </p:style>
+        <p:txBody>
+          <a:bodyPr rtlCol="0" anchor="ctr"/>
+          <a:lstStyle/>
+          <a:p/>
+        </p:txBody>
+      </p:sp>
+      <p:sp>
+        <p:nvSpPr>
+          <p:cNvPr id="20" name="TarjetaTxt 4"/>
+          <p:cNvSpPr txBox="1"/>
+          <p:nvPr/>
+        </p:nvSpPr>
+        <p:spPr>
+          <a:xfrm>
+            <a:off x="548640" y="4023360"/>
+            <a:ext cx="2526030" cy="1060704"/>
+          </a:xfrm>
+          <a:prstGeom prst="rect">
+            <a:avLst/>
+          </a:prstGeom>
+          <a:noFill/>
+        </p:spPr>
+        <p:txBody>
+          <a:bodyPr wrap="square" anchor="t" lIns="45720" rIns="45720" tIns="27432" bIns="27432">
+            <a:normAutofit/>
+          </a:bodyPr>
+          <a:lstStyle/>
+          <a:p>
+            <a:pPr algn="l"/>
+            <a:r>
+              <a:rPr sz="1100" b="1">
+                <a:solidFill>
+                  <a:srgbClr val="5B3E83"/>
+                </a:solidFill>
+                <a:latin typeface="Bricolage Grotesque"/>
+              </a:rPr>
+              <a:t>5 · genial</a:t>
+            </a:r>
+          </a:p>
+          <a:p>
+            <a:pPr algn="l"/>
+            <a:r>
+              <a:rPr sz="1000">
+                <a:solidFill>
+                  <a:srgbClr val="20242E"/>
+                </a:solidFill>
+                <a:latin typeface="Inter"/>
+              </a:rPr>
+              <a:t>estoy genial</a:t>
+            </a:r>
+          </a:p>
+        </p:txBody>
+      </p:sp>
+      <p:sp>
+        <p:nvSpPr>
+          <p:cNvPr id="21" name="Tarjeta 5"/>
+          <p:cNvSpPr/>
+          <p:nvPr/>
+        </p:nvSpPr>
+        <p:spPr>
+          <a:xfrm>
+            <a:off x="3312414" y="3968496"/>
+            <a:ext cx="2708910" cy="1170432"/>
+          </a:xfrm>
+          <a:prstGeom prst="roundRect">
+            <a:avLst>
+              <a:gd name="adj" fmla="val 6000"/>
+            </a:avLst>
+          </a:prstGeom>
+          <a:solidFill>
+            <a:srgbClr val="FFFFFF"/>
+          </a:solidFill>
+          <a:ln w="12700">
+            <a:solidFill>
+              <a:srgbClr val="E4E3DE"/>
+            </a:solidFill>
+          </a:ln>
+          <a:effectLst/>
+        </p:spPr>
+        <p:style>
+          <a:lnRef idx="1">
+            <a:schemeClr val="accent1"/>
+          </a:lnRef>
+          <a:fillRef idx="3">
+            <a:schemeClr val="accent1"/>
+          </a:fillRef>
+          <a:effectRef idx="2">
+            <a:schemeClr val="accent1"/>
+          </a:effectRef>
+          <a:fontRef idx="minor">
+            <a:schemeClr val="lt1"/>
+          </a:fontRef>
+        </p:style>
+        <p:txBody>
+          <a:bodyPr rtlCol="0" anchor="ctr"/>
+          <a:lstStyle/>
+          <a:p/>
+        </p:txBody>
+      </p:sp>
+      <p:sp>
+        <p:nvSpPr>
+          <p:cNvPr id="22" name="TarjetaTxt 5"/>
+          <p:cNvSpPr txBox="1"/>
+          <p:nvPr/>
+        </p:nvSpPr>
+        <p:spPr>
+          <a:xfrm>
+            <a:off x="3403854" y="4023360"/>
+            <a:ext cx="2526030" cy="1060704"/>
+          </a:xfrm>
+          <a:prstGeom prst="rect">
+            <a:avLst/>
+          </a:prstGeom>
+          <a:noFill/>
+        </p:spPr>
+        <p:txBody>
+          <a:bodyPr wrap="square" anchor="t" lIns="45720" rIns="45720" tIns="27432" bIns="27432">
+            <a:normAutofit/>
+          </a:bodyPr>
+          <a:lstStyle/>
+          <a:p>
+            <a:pPr algn="l"/>
+            <a:r>
+              <a:rPr sz="1100" b="1">
+                <a:solidFill>
+                  <a:srgbClr val="5B3E83"/>
+                </a:solidFill>
+                <a:latin typeface="Bricolage Grotesque"/>
+              </a:rPr>
+              <a:t>marco</a:t>
+            </a:r>
+          </a:p>
+          <a:p>
+            <a:pPr algn="l"/>
+            <a:r>
+              <a:rPr sz="1000">
+                <a:solidFill>
+                  <a:srgbClr val="20242E"/>
+                </a:solidFill>
+                <a:latin typeface="Inter"/>
+              </a:rPr>
+              <a:t>El … % de la clase está …</a:t>
+            </a:r>
+          </a:p>
+        </p:txBody>
+      </p:sp>
+      <p:sp>
+        <p:nvSpPr>
+          <p:cNvPr id="23" name="Tarjeta 6"/>
+          <p:cNvSpPr/>
+          <p:nvPr/>
+        </p:nvSpPr>
+        <p:spPr>
+          <a:xfrm>
+            <a:off x="6167628" y="3968496"/>
+            <a:ext cx="2708910" cy="1170432"/>
+          </a:xfrm>
+          <a:prstGeom prst="roundRect">
+            <a:avLst>
+              <a:gd name="adj" fmla="val 6000"/>
+            </a:avLst>
+          </a:prstGeom>
+          <a:solidFill>
+            <a:srgbClr val="FFFFFF"/>
+          </a:solidFill>
+          <a:ln w="12700">
+            <a:solidFill>
+              <a:srgbClr val="E4E3DE"/>
+            </a:solidFill>
+          </a:ln>
+          <a:effectLst/>
+        </p:spPr>
+        <p:style>
+          <a:lnRef idx="1">
+            <a:schemeClr val="accent1"/>
+          </a:lnRef>
+          <a:fillRef idx="3">
+            <a:schemeClr val="accent1"/>
+          </a:fillRef>
+          <a:effectRef idx="2">
+            <a:schemeClr val="accent1"/>
+          </a:effectRef>
+          <a:fontRef idx="minor">
+            <a:schemeClr val="lt1"/>
+          </a:fontRef>
+        </p:style>
+        <p:txBody>
+          <a:bodyPr rtlCol="0" anchor="ctr"/>
+          <a:lstStyle/>
+          <a:p/>
+        </p:txBody>
+      </p:sp>
+      <p:sp>
+        <p:nvSpPr>
+          <p:cNvPr id="24" name="TarjetaTxt 6"/>
+          <p:cNvSpPr txBox="1"/>
+          <p:nvPr/>
+        </p:nvSpPr>
+        <p:spPr>
+          <a:xfrm>
+            <a:off x="6259068" y="4023360"/>
+            <a:ext cx="2526030" cy="1060704"/>
+          </a:xfrm>
+          <a:prstGeom prst="rect">
+            <a:avLst/>
+          </a:prstGeom>
+          <a:noFill/>
+        </p:spPr>
+        <p:txBody>
+          <a:bodyPr wrap="square" anchor="t" lIns="45720" rIns="45720" tIns="27432" bIns="27432">
+            <a:normAutofit/>
+          </a:bodyPr>
+          <a:lstStyle/>
+          <a:p>
+            <a:pPr algn="l"/>
+            <a:r>
+              <a:rPr sz="1100" b="1">
+                <a:solidFill>
+                  <a:srgbClr val="5B3E83"/>
+                </a:solidFill>
+                <a:latin typeface="Bricolage Grotesque"/>
+              </a:rPr>
+              <a:t>marco</a:t>
+            </a:r>
+          </a:p>
+          <a:p>
+            <a:pPr algn="l"/>
+            <a:r>
+              <a:rPr sz="1000">
+                <a:solidFill>
+                  <a:srgbClr val="20242E"/>
+                </a:solidFill>
+                <a:latin typeface="Inter"/>
+              </a:rPr>
+              <a:t>Hoy hay más gente … que el lunes.</a:t>
+            </a:r>
+          </a:p>
+        </p:txBody>
+      </p:sp>
+      <p:sp>
+        <p:nvSpPr>
+          <p:cNvPr id="25" name="Tarjeta 7"/>
+          <p:cNvSpPr/>
+          <p:nvPr/>
+        </p:nvSpPr>
+        <p:spPr>
+          <a:xfrm>
+            <a:off x="9022842" y="3968496"/>
+            <a:ext cx="2708910" cy="1170432"/>
+          </a:xfrm>
+          <a:prstGeom prst="roundRect">
+            <a:avLst>
+              <a:gd name="adj" fmla="val 6000"/>
+            </a:avLst>
+          </a:prstGeom>
+          <a:solidFill>
+            <a:srgbClr val="FFFFFF"/>
+          </a:solidFill>
+          <a:ln w="12700">
+            <a:solidFill>
+              <a:srgbClr val="E4E3DE"/>
+            </a:solidFill>
+          </a:ln>
+          <a:effectLst/>
+        </p:spPr>
+        <p:style>
+          <a:lnRef idx="1">
+            <a:schemeClr val="accent1"/>
+          </a:lnRef>
+          <a:fillRef idx="3">
+            <a:schemeClr val="accent1"/>
+          </a:fillRef>
+          <a:effectRef idx="2">
+            <a:schemeClr val="accent1"/>
+          </a:effectRef>
+          <a:fontRef idx="minor">
+            <a:schemeClr val="lt1"/>
+          </a:fontRef>
+        </p:style>
+        <p:txBody>
+          <a:bodyPr rtlCol="0" anchor="ctr"/>
+          <a:lstStyle/>
+          <a:p/>
+        </p:txBody>
+      </p:sp>
+      <p:sp>
+        <p:nvSpPr>
+          <p:cNvPr id="26" name="TarjetaTxt 7"/>
+          <p:cNvSpPr txBox="1"/>
+          <p:nvPr/>
+        </p:nvSpPr>
+        <p:spPr>
+          <a:xfrm>
+            <a:off x="9114282" y="4023360"/>
+            <a:ext cx="2526030" cy="1060704"/>
+          </a:xfrm>
+          <a:prstGeom prst="rect">
+            <a:avLst/>
+          </a:prstGeom>
+          <a:noFill/>
+        </p:spPr>
+        <p:txBody>
+          <a:bodyPr wrap="square" anchor="t" lIns="45720" rIns="45720" tIns="27432" bIns="27432">
+            <a:normAutofit/>
+          </a:bodyPr>
+          <a:lstStyle/>
+          <a:p>
+            <a:pPr algn="l"/>
+            <a:r>
+              <a:rPr sz="1100" b="1">
+                <a:solidFill>
+                  <a:srgbClr val="5B3E83"/>
+                </a:solidFill>
+                <a:latin typeface="Bricolage Grotesque"/>
+              </a:rPr>
+              <a:t>marco</a:t>
+            </a:r>
+          </a:p>
+          <a:p>
+            <a:pPr algn="l"/>
+            <a:r>
+              <a:rPr sz="1000">
+                <a:solidFill>
+                  <a:srgbClr val="20242E"/>
+                </a:solidFill>
+                <a:latin typeface="Inter"/>
+              </a:rPr>
+              <a:t>Nadie está … , y eso es buena señal.</a:t>
+            </a:r>
+          </a:p>
+        </p:txBody>
+      </p:sp>
+      <p:sp>
+        <p:nvSpPr>
+          <p:cNvPr id="27" name="Tarjeta 8"/>
+          <p:cNvSpPr/>
+          <p:nvPr/>
+        </p:nvSpPr>
+        <p:spPr>
+          <a:xfrm>
+            <a:off x="457200" y="5266944"/>
+            <a:ext cx="2708910" cy="1170432"/>
+          </a:xfrm>
+          <a:prstGeom prst="roundRect">
+            <a:avLst>
+              <a:gd name="adj" fmla="val 6000"/>
+            </a:avLst>
+          </a:prstGeom>
+          <a:solidFill>
+            <a:srgbClr val="FFFFFF"/>
+          </a:solidFill>
+          <a:ln w="12700">
+            <a:solidFill>
+              <a:srgbClr val="E4E3DE"/>
+            </a:solidFill>
+          </a:ln>
+          <a:effectLst/>
+        </p:spPr>
+        <p:style>
+          <a:lnRef idx="1">
+            <a:schemeClr val="accent1"/>
+          </a:lnRef>
+          <a:fillRef idx="3">
+            <a:schemeClr val="accent1"/>
+          </a:fillRef>
+          <a:effectRef idx="2">
+            <a:schemeClr val="accent1"/>
+          </a:effectRef>
+          <a:fontRef idx="minor">
+            <a:schemeClr val="lt1"/>
+          </a:fontRef>
+        </p:style>
+        <p:txBody>
+          <a:bodyPr rtlCol="0" anchor="ctr"/>
+          <a:lstStyle/>
+          <a:p/>
+        </p:txBody>
+      </p:sp>
+      <p:sp>
+        <p:nvSpPr>
+          <p:cNvPr id="28" name="TarjetaTxt 8"/>
+          <p:cNvSpPr txBox="1"/>
+          <p:nvPr/>
+        </p:nvSpPr>
+        <p:spPr>
+          <a:xfrm>
+            <a:off x="548640" y="5321808"/>
+            <a:ext cx="2526030" cy="1060704"/>
+          </a:xfrm>
+          <a:prstGeom prst="rect">
+            <a:avLst/>
+          </a:prstGeom>
+          <a:noFill/>
+        </p:spPr>
+        <p:txBody>
+          <a:bodyPr wrap="square" anchor="t" lIns="45720" rIns="45720" tIns="27432" bIns="27432">
+            <a:normAutofit/>
+          </a:bodyPr>
+          <a:lstStyle/>
+          <a:p>
+            <a:pPr algn="l"/>
+            <a:r>
+              <a:rPr sz="1100" b="1">
+                <a:solidFill>
+                  <a:srgbClr val="5B3E83"/>
+                </a:solidFill>
+                <a:latin typeface="Bricolage Grotesque"/>
+              </a:rPr>
+              <a:t>marco</a:t>
+            </a:r>
+          </a:p>
+          <a:p>
+            <a:pPr algn="l"/>
+            <a:r>
+              <a:rPr sz="1000">
+                <a:solidFill>
+                  <a:srgbClr val="20242E"/>
+                </a:solidFill>
+                <a:latin typeface="Inter"/>
+              </a:rPr>
+              <a:t>La media de la clase es de … sobre cinco.</a:t>
+            </a:r>
+          </a:p>
+        </p:txBody>
+      </p:sp>
+      <p:sp>
+        <p:nvSpPr>
+          <p:cNvPr id="29" name="Tarjeta 9"/>
+          <p:cNvSpPr/>
+          <p:nvPr/>
+        </p:nvSpPr>
+        <p:spPr>
+          <a:xfrm>
+            <a:off x="3312414" y="5266944"/>
+            <a:ext cx="2708910" cy="1170432"/>
+          </a:xfrm>
+          <a:prstGeom prst="roundRect">
+            <a:avLst>
+              <a:gd name="adj" fmla="val 6000"/>
+            </a:avLst>
+          </a:prstGeom>
+          <a:solidFill>
+            <a:srgbClr val="FFFFFF"/>
+          </a:solidFill>
+          <a:ln w="12700">
+            <a:solidFill>
+              <a:srgbClr val="E4E3DE"/>
+            </a:solidFill>
+          </a:ln>
+          <a:effectLst/>
+        </p:spPr>
+        <p:style>
+          <a:lnRef idx="1">
+            <a:schemeClr val="accent1"/>
+          </a:lnRef>
+          <a:fillRef idx="3">
+            <a:schemeClr val="accent1"/>
+          </a:fillRef>
+          <a:effectRef idx="2">
+            <a:schemeClr val="accent1"/>
+          </a:effectRef>
+          <a:fontRef idx="minor">
+            <a:schemeClr val="lt1"/>
+          </a:fontRef>
+        </p:style>
+        <p:txBody>
+          <a:bodyPr rtlCol="0" anchor="ctr"/>
+          <a:lstStyle/>
+          <a:p/>
+        </p:txBody>
+      </p:sp>
+      <p:sp>
+        <p:nvSpPr>
+          <p:cNvPr id="30" name="TarjetaTxt 9"/>
+          <p:cNvSpPr txBox="1"/>
+          <p:nvPr/>
+        </p:nvSpPr>
+        <p:spPr>
+          <a:xfrm>
+            <a:off x="3403854" y="5321808"/>
+            <a:ext cx="2526030" cy="1060704"/>
+          </a:xfrm>
+          <a:prstGeom prst="rect">
+            <a:avLst/>
+          </a:prstGeom>
+          <a:noFill/>
+        </p:spPr>
+        <p:txBody>
+          <a:bodyPr wrap="square" anchor="t" lIns="45720" rIns="45720" tIns="27432" bIns="27432">
+            <a:normAutofit/>
+          </a:bodyPr>
+          <a:lstStyle/>
+          <a:p>
+            <a:pPr algn="l"/>
+            <a:r>
+              <a:rPr sz="1100" b="1">
+                <a:solidFill>
+                  <a:srgbClr val="5B3E83"/>
+                </a:solidFill>
+                <a:latin typeface="Bricolage Grotesque"/>
+              </a:rPr>
+              <a:t>marco</a:t>
+            </a:r>
+          </a:p>
+          <a:p>
+            <a:pPr algn="l"/>
+            <a:r>
+              <a:rPr sz="1000">
+                <a:solidFill>
+                  <a:srgbClr val="20242E"/>
+                </a:solidFill>
+                <a:latin typeface="Inter"/>
+              </a:rPr>
+              <a:t>El viernes la clase está … que el lunes.</a:t>
+            </a:r>
+          </a:p>
+        </p:txBody>
+      </p:sp>
+      <p:sp>
+        <p:nvSpPr>
+          <p:cNvPr id="31" name="Tarjeta 10"/>
+          <p:cNvSpPr/>
+          <p:nvPr/>
+        </p:nvSpPr>
+        <p:spPr>
+          <a:xfrm>
+            <a:off x="6167628" y="5266944"/>
+            <a:ext cx="2708910" cy="1170432"/>
+          </a:xfrm>
+          <a:prstGeom prst="roundRect">
+            <a:avLst>
+              <a:gd name="adj" fmla="val 6000"/>
+            </a:avLst>
+          </a:prstGeom>
+          <a:solidFill>
+            <a:srgbClr val="FFFFFF"/>
+          </a:solidFill>
+          <a:ln w="12700">
+            <a:solidFill>
+              <a:srgbClr val="E4E3DE"/>
+            </a:solidFill>
+          </a:ln>
+          <a:effectLst/>
+        </p:spPr>
+        <p:style>
+          <a:lnRef idx="1">
+            <a:schemeClr val="accent1"/>
+          </a:lnRef>
+          <a:fillRef idx="3">
+            <a:schemeClr val="accent1"/>
+          </a:fillRef>
+          <a:effectRef idx="2">
+            <a:schemeClr val="accent1"/>
+          </a:effectRef>
+          <a:fontRef idx="minor">
+            <a:schemeClr val="lt1"/>
+          </a:fontRef>
+        </p:style>
+        <p:txBody>
+          <a:bodyPr rtlCol="0" anchor="ctr"/>
+          <a:lstStyle/>
+          <a:p/>
+        </p:txBody>
+      </p:sp>
+      <p:sp>
+        <p:nvSpPr>
+          <p:cNvPr id="32" name="TarjetaTxt 10"/>
+          <p:cNvSpPr txBox="1"/>
+          <p:nvPr/>
+        </p:nvSpPr>
+        <p:spPr>
+          <a:xfrm>
+            <a:off x="6259068" y="5321808"/>
+            <a:ext cx="2526030" cy="1060704"/>
+          </a:xfrm>
+          <a:prstGeom prst="rect">
+            <a:avLst/>
+          </a:prstGeom>
+          <a:noFill/>
+        </p:spPr>
+        <p:txBody>
+          <a:bodyPr wrap="square" anchor="t" lIns="45720" rIns="45720" tIns="27432" bIns="27432">
+            <a:normAutofit/>
+          </a:bodyPr>
+          <a:lstStyle/>
+          <a:p>
+            <a:pPr algn="l"/>
+            <a:r>
+              <a:rPr sz="1100" b="1">
+                <a:solidFill>
+                  <a:srgbClr val="5B3E83"/>
+                </a:solidFill>
+                <a:latin typeface="Bricolage Grotesque"/>
+              </a:rPr>
+              <a:t>Acuerdo</a:t>
+            </a:r>
+          </a:p>
+          <a:p>
+            <a:pPr algn="l"/>
+            <a:r>
+              <a:rPr sz="1000">
+                <a:solidFill>
+                  <a:srgbClr val="20242E"/>
+                </a:solidFill>
+                <a:latin typeface="Inter"/>
+              </a:rPr>
+              <a:t>Nadie tiene que decir por qué. El termómetro mide la clase, no a las personas.</a:t>
+            </a:r>
+          </a:p>
+        </p:txBody>
+      </p:sp>
+    </p:spTree>
+  </p:cSld>
+  <p:clrMapOvr>
+    <a:masterClrMapping/>
+  </p:clrMapOvr>
+</p:sld>
+</file>
+
+<file path=ppt/slides/slide26.xml><?xml version="1.0" encoding="utf-8"?>
+<p:sld xmlns:a="http://schemas.openxmlformats.org/drawingml/2006/main" xmlns:p="http://schemas.openxmlformats.org/presentationml/2006/main" xmlns:r="http://schemas.openxmlformats.org/officeDocument/2006/relationships">
+  <p:cSld>
+    <p:spTree>
+      <p:nvGrpSpPr>
+        <p:cNvPr id="1" name=""/>
+        <p:cNvGrpSpPr/>
+        <p:nvPr/>
+      </p:nvGrpSpPr>
+      <p:grpSpPr/>
+      <p:sp>
+        <p:nvSpPr>
+          <p:cNvPr id="2" name="Fondo"/>
+          <p:cNvSpPr/>
+          <p:nvPr/>
+        </p:nvSpPr>
+        <p:spPr>
+          <a:xfrm>
+            <a:off x="0" y="0"/>
+            <a:ext cx="12191695" cy="6858000"/>
+          </a:xfrm>
+          <a:prstGeom prst="rect">
+            <a:avLst/>
+          </a:prstGeom>
+          <a:solidFill>
+            <a:srgbClr val="FCFBF8"/>
+          </a:solidFill>
+          <a:ln>
+            <a:noFill/>
+          </a:ln>
+          <a:effectLst/>
+        </p:spPr>
+        <p:style>
+          <a:lnRef idx="1">
+            <a:schemeClr val="accent1"/>
+          </a:lnRef>
+          <a:fillRef idx="3">
+            <a:schemeClr val="accent1"/>
+          </a:fillRef>
+          <a:effectRef idx="2">
+            <a:schemeClr val="accent1"/>
+          </a:effectRef>
+          <a:fontRef idx="minor">
+            <a:schemeClr val="lt1"/>
+          </a:fontRef>
+        </p:style>
+        <p:txBody>
+          <a:bodyPr rtlCol="0" anchor="ctr"/>
+          <a:lstStyle/>
+          <a:p/>
+        </p:txBody>
+      </p:sp>
+      <p:sp>
+        <p:nvSpPr>
+          <p:cNvPr id="3" name="Cabecera"/>
+          <p:cNvSpPr/>
+          <p:nvPr/>
+        </p:nvSpPr>
+        <p:spPr>
+          <a:xfrm>
+            <a:off x="0" y="0"/>
+            <a:ext cx="12191695" cy="1078992"/>
+          </a:xfrm>
+          <a:prstGeom prst="rect">
+            <a:avLst/>
+          </a:prstGeom>
+          <a:solidFill>
+            <a:srgbClr val="7C56A9"/>
+          </a:solidFill>
+          <a:ln>
+            <a:noFill/>
+          </a:ln>
+          <a:effectLst/>
+        </p:spPr>
+        <p:style>
+          <a:lnRef idx="1">
+            <a:schemeClr val="accent1"/>
+          </a:lnRef>
+          <a:fillRef idx="3">
+            <a:schemeClr val="accent1"/>
+          </a:fillRef>
+          <a:effectRef idx="2">
+            <a:schemeClr val="accent1"/>
+          </a:effectRef>
+          <a:fontRef idx="minor">
+            <a:schemeClr val="lt1"/>
+          </a:fontRef>
+        </p:style>
+        <p:txBody>
+          <a:bodyPr rtlCol="0" anchor="ctr"/>
+          <a:lstStyle/>
+          <a:p/>
+        </p:txBody>
+      </p:sp>
+      <p:sp>
+        <p:nvSpPr>
+          <p:cNvPr id="4" name="Chip"/>
+          <p:cNvSpPr/>
+          <p:nvPr/>
+        </p:nvSpPr>
+        <p:spPr>
+          <a:xfrm>
+            <a:off x="457200" y="182880"/>
+            <a:ext cx="3017520" cy="292608"/>
+          </a:xfrm>
+          <a:prstGeom prst="roundRect">
+            <a:avLst>
+              <a:gd name="adj" fmla="val 50000"/>
+            </a:avLst>
+          </a:prstGeom>
+          <a:solidFill>
+            <a:srgbClr val="FFFFFF"/>
+          </a:solidFill>
+          <a:ln>
+            <a:noFill/>
+          </a:ln>
+          <a:effectLst/>
+        </p:spPr>
+        <p:style>
+          <a:lnRef idx="1">
+            <a:schemeClr val="accent1"/>
+          </a:lnRef>
+          <a:fillRef idx="3">
+            <a:schemeClr val="accent1"/>
+          </a:fillRef>
+          <a:effectRef idx="2">
+            <a:schemeClr val="accent1"/>
+          </a:effectRef>
+          <a:fontRef idx="minor">
+            <a:schemeClr val="lt1"/>
+          </a:fontRef>
+        </p:style>
+        <p:txBody>
+          <a:bodyPr rtlCol="0" anchor="ctr"/>
+          <a:lstStyle/>
+          <a:p/>
+        </p:txBody>
+      </p:sp>
+      <p:sp>
+        <p:nvSpPr>
+          <p:cNvPr id="5" name="ChipTxt"/>
+          <p:cNvSpPr txBox="1"/>
+          <p:nvPr/>
+        </p:nvSpPr>
+        <p:spPr>
+          <a:xfrm>
+            <a:off x="457200" y="173736"/>
+            <a:ext cx="3017520" cy="310896"/>
+          </a:xfrm>
+          <a:prstGeom prst="rect">
+            <a:avLst/>
+          </a:prstGeom>
+          <a:noFill/>
+        </p:spPr>
+        <p:txBody>
+          <a:bodyPr wrap="square" anchor="ctr" lIns="45720" rIns="45720" tIns="27432" bIns="27432">
+            <a:normAutofit/>
+          </a:bodyPr>
+          <a:lstStyle/>
+          <a:p>
+            <a:pPr algn="ctr"/>
+            <a:r>
+              <a:rPr sz="950" b="1">
+                <a:solidFill>
+                  <a:srgbClr val="5B3E83"/>
+                </a:solidFill>
+                <a:latin typeface="Inter"/>
+              </a:rPr>
+              <a:t>RETO 7 · SIMULATIE MET BEPERKING</a:t>
+            </a:r>
+          </a:p>
+        </p:txBody>
+      </p:sp>
+      <p:sp>
+        <p:nvSpPr>
+          <p:cNvPr id="6" name="Titulo"/>
+          <p:cNvSpPr txBox="1"/>
+          <p:nvPr/>
+        </p:nvSpPr>
+        <p:spPr>
+          <a:xfrm>
+            <a:off x="457200" y="502920"/>
+            <a:ext cx="8412480" cy="475488"/>
+          </a:xfrm>
+          <a:prstGeom prst="rect">
+            <a:avLst/>
+          </a:prstGeom>
+          <a:noFill/>
+        </p:spPr>
+        <p:txBody>
+          <a:bodyPr wrap="square" anchor="t" lIns="45720" rIns="45720" tIns="27432" bIns="27432">
+            <a:normAutofit/>
+          </a:bodyPr>
+          <a:lstStyle/>
+          <a:p>
+            <a:pPr algn="l"/>
+            <a:r>
+              <a:rPr sz="2700" b="1">
+                <a:solidFill>
+                  <a:srgbClr val="FFFFFF"/>
+                </a:solidFill>
+                <a:latin typeface="Bricolage Grotesque"/>
+              </a:rPr>
+              <a:t>Rutinas extremas</a:t>
+            </a:r>
+          </a:p>
+        </p:txBody>
+      </p:sp>
+      <p:sp>
+        <p:nvSpPr>
+          <p:cNvPr id="7" name="Badges"/>
+          <p:cNvSpPr txBox="1"/>
+          <p:nvPr/>
+        </p:nvSpPr>
+        <p:spPr>
+          <a:xfrm>
+            <a:off x="9052560" y="256032"/>
+            <a:ext cx="2651760" cy="640080"/>
+          </a:xfrm>
+          <a:prstGeom prst="rect">
+            <a:avLst/>
+          </a:prstGeom>
+          <a:noFill/>
+        </p:spPr>
+        <p:txBody>
+          <a:bodyPr wrap="square" anchor="t" lIns="45720" rIns="45720" tIns="27432" bIns="27432">
+            <a:normAutofit/>
+          </a:bodyPr>
+          <a:lstStyle/>
+          <a:p>
+            <a:pPr algn="r"/>
+            <a:r>
+              <a:rPr sz="1000">
+                <a:solidFill>
+                  <a:srgbClr val="EEE8F5"/>
+                </a:solidFill>
+                <a:latin typeface="Inter"/>
+              </a:rPr>
+              <a:t>👥 En parejas</a:t>
+            </a:r>
+          </a:p>
+          <a:p>
+            <a:pPr algn="r"/>
+            <a:r>
+              <a:rPr sz="1000">
+                <a:solidFill>
+                  <a:srgbClr val="EEE8F5"/>
+                </a:solidFill>
+                <a:latin typeface="Inter"/>
+              </a:rPr>
+              <a:t>± 15 min · ★★★</a:t>
+            </a:r>
+          </a:p>
+        </p:txBody>
+      </p:sp>
+      <p:sp>
+        <p:nvSpPr>
+          <p:cNvPr id="8" name="Gancho"/>
+          <p:cNvSpPr txBox="1"/>
+          <p:nvPr/>
+        </p:nvSpPr>
+        <p:spPr>
+          <a:xfrm>
+            <a:off x="457200" y="1225296"/>
+            <a:ext cx="11274552" cy="566928"/>
+          </a:xfrm>
+          <a:prstGeom prst="rect">
+            <a:avLst/>
+          </a:prstGeom>
+          <a:noFill/>
+        </p:spPr>
+        <p:txBody>
+          <a:bodyPr wrap="square" anchor="t" lIns="45720" rIns="45720" tIns="27432" bIns="27432">
+            <a:normAutofit/>
+          </a:bodyPr>
+          <a:lstStyle/>
+          <a:p>
+            <a:pPr algn="l"/>
+            <a:r>
+              <a:rPr sz="1600" b="1">
+                <a:solidFill>
+                  <a:srgbClr val="5B3E83"/>
+                </a:solidFill>
+                <a:latin typeface="Bricolage Grotesque"/>
+              </a:rPr>
+              <a:t>Astronauta, panadero de noche, nadadora olímpica. ¿Quién tiene el peor despertador?</a:t>
+            </a:r>
+          </a:p>
+          <a:p>
+            <a:pPr algn="l"/>
+            <a:r>
+              <a:rPr sz="1100" i="1">
+                <a:solidFill>
+                  <a:srgbClr val="6A6E78"/>
+                </a:solidFill>
+                <a:latin typeface="Inter"/>
+              </a:rPr>
+              <a:t>Astronaut, nachtbakker, olympisch zwemster. Wie heeft de ergste wekker?</a:t>
+            </a:r>
+          </a:p>
+        </p:txBody>
+      </p:sp>
+      <p:sp>
+        <p:nvSpPr>
+          <p:cNvPr id="9" name="ReglaCaja"/>
+          <p:cNvSpPr/>
+          <p:nvPr/>
+        </p:nvSpPr>
+        <p:spPr>
+          <a:xfrm>
+            <a:off x="457200" y="1847088"/>
+            <a:ext cx="11274552" cy="658368"/>
+          </a:xfrm>
+          <a:prstGeom prst="roundRect">
+            <a:avLst>
+              <a:gd name="adj" fmla="val 5000"/>
+            </a:avLst>
+          </a:prstGeom>
+          <a:solidFill>
+            <a:srgbClr val="FBF3D6"/>
+          </a:solidFill>
+          <a:ln>
+            <a:noFill/>
+          </a:ln>
+          <a:effectLst/>
+        </p:spPr>
+        <p:style>
+          <a:lnRef idx="1">
+            <a:schemeClr val="accent1"/>
+          </a:lnRef>
+          <a:fillRef idx="3">
+            <a:schemeClr val="accent1"/>
+          </a:fillRef>
+          <a:effectRef idx="2">
+            <a:schemeClr val="accent1"/>
+          </a:effectRef>
+          <a:fontRef idx="minor">
+            <a:schemeClr val="lt1"/>
+          </a:fontRef>
+        </p:style>
+        <p:txBody>
+          <a:bodyPr rtlCol="0" anchor="ctr"/>
+          <a:lstStyle/>
+          <a:p/>
+        </p:txBody>
+      </p:sp>
+      <p:sp>
+        <p:nvSpPr>
+          <p:cNvPr id="10" name="ReglaTxt"/>
+          <p:cNvSpPr txBox="1"/>
+          <p:nvPr/>
+        </p:nvSpPr>
+        <p:spPr>
+          <a:xfrm>
+            <a:off x="603504" y="1883664"/>
+            <a:ext cx="10972800" cy="585216"/>
+          </a:xfrm>
+          <a:prstGeom prst="rect">
+            <a:avLst/>
+          </a:prstGeom>
+          <a:noFill/>
+        </p:spPr>
+        <p:txBody>
+          <a:bodyPr wrap="square" anchor="t" lIns="45720" rIns="45720" tIns="27432" bIns="27432">
+            <a:normAutofit/>
+          </a:bodyPr>
+          <a:lstStyle/>
+          <a:p>
+            <a:pPr algn="l"/>
+            <a:r>
+              <a:rPr sz="850" b="1">
+                <a:solidFill>
+                  <a:srgbClr val="B7860B"/>
+                </a:solidFill>
+                <a:latin typeface="Inter"/>
+              </a:rPr>
+              <a:t>LA REGLA DEL RETO</a:t>
+            </a:r>
+          </a:p>
+          <a:p>
+            <a:pPr algn="l"/>
+            <a:r>
+              <a:rPr sz="1100">
+                <a:solidFill>
+                  <a:srgbClr val="20242E"/>
+                </a:solidFill>
+                <a:latin typeface="Inter"/>
+              </a:rPr>
+              <a:t>Elke vergelijking noemt twee uren: het zijne en het jouwe. «Se levanta muy temprano» telt niet; «se levanta a las cuatro y yo a las siete» wel.</a:t>
+            </a:r>
+          </a:p>
+        </p:txBody>
+      </p:sp>
+      <p:sp>
+        <p:nvSpPr>
+          <p:cNvPr id="11" name="Tarjeta 0"/>
+          <p:cNvSpPr/>
+          <p:nvPr/>
+        </p:nvSpPr>
+        <p:spPr>
+          <a:xfrm>
+            <a:off x="457200" y="2670048"/>
+            <a:ext cx="2708910" cy="1170432"/>
+          </a:xfrm>
+          <a:prstGeom prst="roundRect">
+            <a:avLst>
+              <a:gd name="adj" fmla="val 6000"/>
+            </a:avLst>
+          </a:prstGeom>
+          <a:solidFill>
+            <a:srgbClr val="FFFFFF"/>
+          </a:solidFill>
+          <a:ln w="12700">
+            <a:solidFill>
+              <a:srgbClr val="E4E3DE"/>
+            </a:solidFill>
+          </a:ln>
+          <a:effectLst/>
+        </p:spPr>
+        <p:style>
+          <a:lnRef idx="1">
+            <a:schemeClr val="accent1"/>
+          </a:lnRef>
+          <a:fillRef idx="3">
+            <a:schemeClr val="accent1"/>
+          </a:fillRef>
+          <a:effectRef idx="2">
+            <a:schemeClr val="accent1"/>
+          </a:effectRef>
+          <a:fontRef idx="minor">
+            <a:schemeClr val="lt1"/>
+          </a:fontRef>
+        </p:style>
+        <p:txBody>
+          <a:bodyPr rtlCol="0" anchor="ctr"/>
+          <a:lstStyle/>
+          <a:p/>
+        </p:txBody>
+      </p:sp>
+      <p:sp>
+        <p:nvSpPr>
+          <p:cNvPr id="12" name="TarjetaTxt 0"/>
+          <p:cNvSpPr txBox="1"/>
+          <p:nvPr/>
+        </p:nvSpPr>
+        <p:spPr>
+          <a:xfrm>
+            <a:off x="548640" y="2724912"/>
+            <a:ext cx="2526030" cy="1060704"/>
+          </a:xfrm>
+          <a:prstGeom prst="rect">
+            <a:avLst/>
+          </a:prstGeom>
+          <a:noFill/>
+        </p:spPr>
+        <p:txBody>
+          <a:bodyPr wrap="square" anchor="t" lIns="45720" rIns="45720" tIns="27432" bIns="27432">
+            <a:normAutofit/>
+          </a:bodyPr>
+          <a:lstStyle/>
+          <a:p>
+            <a:pPr algn="l"/>
+            <a:r>
+              <a:rPr sz="1100" b="1">
+                <a:solidFill>
+                  <a:srgbClr val="5B3E83"/>
+                </a:solidFill>
+                <a:latin typeface="Bricolage Grotesque"/>
+              </a:rPr>
+              <a:t>astronauta en la EEI</a:t>
+            </a:r>
+          </a:p>
+          <a:p>
+            <a:pPr algn="l"/>
+            <a:r>
+              <a:rPr sz="1000">
+                <a:solidFill>
+                  <a:srgbClr val="20242E"/>
+                </a:solidFill>
+                <a:latin typeface="Inter"/>
+              </a:rPr>
+              <a:t>se despierta a las 6:00 UTC · hace deporte dos horas al día · ve dieciséis amaneceres · se duerme atado</a:t>
+            </a:r>
+          </a:p>
+        </p:txBody>
+      </p:sp>
+      <p:sp>
+        <p:nvSpPr>
+          <p:cNvPr id="13" name="Tarjeta 1"/>
+          <p:cNvSpPr/>
+          <p:nvPr/>
+        </p:nvSpPr>
+        <p:spPr>
+          <a:xfrm>
+            <a:off x="3312414" y="2670048"/>
+            <a:ext cx="2708910" cy="1170432"/>
+          </a:xfrm>
+          <a:prstGeom prst="roundRect">
+            <a:avLst>
+              <a:gd name="adj" fmla="val 6000"/>
+            </a:avLst>
+          </a:prstGeom>
+          <a:solidFill>
+            <a:srgbClr val="FFFFFF"/>
+          </a:solidFill>
+          <a:ln w="12700">
+            <a:solidFill>
+              <a:srgbClr val="E4E3DE"/>
+            </a:solidFill>
+          </a:ln>
+          <a:effectLst/>
+        </p:spPr>
+        <p:style>
+          <a:lnRef idx="1">
+            <a:schemeClr val="accent1"/>
+          </a:lnRef>
+          <a:fillRef idx="3">
+            <a:schemeClr val="accent1"/>
+          </a:fillRef>
+          <a:effectRef idx="2">
+            <a:schemeClr val="accent1"/>
+          </a:effectRef>
+          <a:fontRef idx="minor">
+            <a:schemeClr val="lt1"/>
+          </a:fontRef>
+        </p:style>
+        <p:txBody>
+          <a:bodyPr rtlCol="0" anchor="ctr"/>
+          <a:lstStyle/>
+          <a:p/>
+        </p:txBody>
+      </p:sp>
+      <p:sp>
+        <p:nvSpPr>
+          <p:cNvPr id="14" name="TarjetaTxt 1"/>
+          <p:cNvSpPr txBox="1"/>
+          <p:nvPr/>
+        </p:nvSpPr>
+        <p:spPr>
+          <a:xfrm>
+            <a:off x="3403854" y="2724912"/>
+            <a:ext cx="2526030" cy="1060704"/>
+          </a:xfrm>
+          <a:prstGeom prst="rect">
+            <a:avLst/>
+          </a:prstGeom>
+          <a:noFill/>
+        </p:spPr>
+        <p:txBody>
+          <a:bodyPr wrap="square" anchor="t" lIns="45720" rIns="45720" tIns="27432" bIns="27432">
+            <a:normAutofit/>
+          </a:bodyPr>
+          <a:lstStyle/>
+          <a:p>
+            <a:pPr algn="l"/>
+            <a:r>
+              <a:rPr sz="1100" b="1">
+                <a:solidFill>
+                  <a:srgbClr val="5B3E83"/>
+                </a:solidFill>
+                <a:latin typeface="Bricolage Grotesque"/>
+              </a:rPr>
+              <a:t>panadero/-a de noche</a:t>
+            </a:r>
+          </a:p>
+          <a:p>
+            <a:pPr algn="l"/>
+            <a:r>
+              <a:rPr sz="1000">
+                <a:solidFill>
+                  <a:srgbClr val="20242E"/>
+                </a:solidFill>
+                <a:latin typeface="Inter"/>
+              </a:rPr>
+              <a:t>entra a las 23:00 · el primer pan sale a las 5:00 · se acuesta a las 14:00 · libra los domingos</a:t>
+            </a:r>
+          </a:p>
+        </p:txBody>
+      </p:sp>
+      <p:sp>
+        <p:nvSpPr>
+          <p:cNvPr id="15" name="Tarjeta 2"/>
+          <p:cNvSpPr/>
+          <p:nvPr/>
+        </p:nvSpPr>
+        <p:spPr>
+          <a:xfrm>
+            <a:off x="6167628" y="2670048"/>
+            <a:ext cx="2708910" cy="1170432"/>
+          </a:xfrm>
+          <a:prstGeom prst="roundRect">
+            <a:avLst>
+              <a:gd name="adj" fmla="val 6000"/>
+            </a:avLst>
+          </a:prstGeom>
+          <a:solidFill>
+            <a:srgbClr val="FFFFFF"/>
+          </a:solidFill>
+          <a:ln w="12700">
+            <a:solidFill>
+              <a:srgbClr val="E4E3DE"/>
+            </a:solidFill>
+          </a:ln>
+          <a:effectLst/>
+        </p:spPr>
+        <p:style>
+          <a:lnRef idx="1">
+            <a:schemeClr val="accent1"/>
+          </a:lnRef>
+          <a:fillRef idx="3">
+            <a:schemeClr val="accent1"/>
+          </a:fillRef>
+          <a:effectRef idx="2">
+            <a:schemeClr val="accent1"/>
+          </a:effectRef>
+          <a:fontRef idx="minor">
+            <a:schemeClr val="lt1"/>
+          </a:fontRef>
+        </p:style>
+        <p:txBody>
+          <a:bodyPr rtlCol="0" anchor="ctr"/>
+          <a:lstStyle/>
+          <a:p/>
+        </p:txBody>
+      </p:sp>
+      <p:sp>
+        <p:nvSpPr>
+          <p:cNvPr id="16" name="TarjetaTxt 2"/>
+          <p:cNvSpPr txBox="1"/>
+          <p:nvPr/>
+        </p:nvSpPr>
+        <p:spPr>
+          <a:xfrm>
+            <a:off x="6259068" y="2724912"/>
+            <a:ext cx="2526030" cy="1060704"/>
+          </a:xfrm>
+          <a:prstGeom prst="rect">
+            <a:avLst/>
+          </a:prstGeom>
+          <a:noFill/>
+        </p:spPr>
+        <p:txBody>
+          <a:bodyPr wrap="square" anchor="t" lIns="45720" rIns="45720" tIns="27432" bIns="27432">
+            <a:normAutofit/>
+          </a:bodyPr>
+          <a:lstStyle/>
+          <a:p>
+            <a:pPr algn="l"/>
+            <a:r>
+              <a:rPr sz="1100" b="1">
+                <a:solidFill>
+                  <a:srgbClr val="5B3E83"/>
+                </a:solidFill>
+                <a:latin typeface="Bricolage Grotesque"/>
+              </a:rPr>
+              <a:t>nadador/-a olímpico/-a</a:t>
+            </a:r>
+          </a:p>
+          <a:p>
+            <a:pPr algn="l"/>
+            <a:r>
+              <a:rPr sz="1000">
+                <a:solidFill>
+                  <a:srgbClr val="20242E"/>
+                </a:solidFill>
+                <a:latin typeface="Inter"/>
+              </a:rPr>
+              <a:t>se levanta a las 4:45 · dos entrenamientos al día · come cinco veces · se acuesta a las 21:00</a:t>
+            </a:r>
+          </a:p>
+        </p:txBody>
+      </p:sp>
+      <p:sp>
+        <p:nvSpPr>
+          <p:cNvPr id="17" name="Tarjeta 3"/>
+          <p:cNvSpPr/>
+          <p:nvPr/>
+        </p:nvSpPr>
+        <p:spPr>
+          <a:xfrm>
+            <a:off x="9022842" y="2670048"/>
+            <a:ext cx="2708910" cy="1170432"/>
+          </a:xfrm>
+          <a:prstGeom prst="roundRect">
+            <a:avLst>
+              <a:gd name="adj" fmla="val 6000"/>
+            </a:avLst>
+          </a:prstGeom>
+          <a:solidFill>
+            <a:srgbClr val="FFFFFF"/>
+          </a:solidFill>
+          <a:ln w="12700">
+            <a:solidFill>
+              <a:srgbClr val="E4E3DE"/>
+            </a:solidFill>
+          </a:ln>
+          <a:effectLst/>
+        </p:spPr>
+        <p:style>
+          <a:lnRef idx="1">
+            <a:schemeClr val="accent1"/>
+          </a:lnRef>
+          <a:fillRef idx="3">
+            <a:schemeClr val="accent1"/>
+          </a:fillRef>
+          <a:effectRef idx="2">
+            <a:schemeClr val="accent1"/>
+          </a:effectRef>
+          <a:fontRef idx="minor">
+            <a:schemeClr val="lt1"/>
+          </a:fontRef>
+        </p:style>
+        <p:txBody>
+          <a:bodyPr rtlCol="0" anchor="ctr"/>
+          <a:lstStyle/>
+          <a:p/>
+        </p:txBody>
+      </p:sp>
+      <p:sp>
+        <p:nvSpPr>
+          <p:cNvPr id="18" name="TarjetaTxt 3"/>
+          <p:cNvSpPr txBox="1"/>
+          <p:nvPr/>
+        </p:nvSpPr>
+        <p:spPr>
+          <a:xfrm>
+            <a:off x="9114282" y="2724912"/>
+            <a:ext cx="2526030" cy="1060704"/>
+          </a:xfrm>
+          <a:prstGeom prst="rect">
+            <a:avLst/>
+          </a:prstGeom>
+          <a:noFill/>
+        </p:spPr>
+        <p:txBody>
+          <a:bodyPr wrap="square" anchor="t" lIns="45720" rIns="45720" tIns="27432" bIns="27432">
+            <a:normAutofit/>
+          </a:bodyPr>
+          <a:lstStyle/>
+          <a:p>
+            <a:pPr algn="l"/>
+            <a:r>
+              <a:rPr sz="1100" b="1">
+                <a:solidFill>
+                  <a:srgbClr val="5B3E83"/>
+                </a:solidFill>
+                <a:latin typeface="Bricolage Grotesque"/>
+              </a:rPr>
+              <a:t>médico/-a de urgencias</a:t>
+            </a:r>
+          </a:p>
+          <a:p>
+            <a:pPr algn="l"/>
+            <a:r>
+              <a:rPr sz="1000">
+                <a:solidFill>
+                  <a:srgbClr val="20242E"/>
+                </a:solidFill>
+                <a:latin typeface="Inter"/>
+              </a:rPr>
+              <a:t>turnos de doce horas · come cuando puede · duerme de día una semana de cada tres</a:t>
+            </a:r>
+          </a:p>
+        </p:txBody>
+      </p:sp>
+      <p:sp>
+        <p:nvSpPr>
+          <p:cNvPr id="19" name="Tarjeta 4"/>
+          <p:cNvSpPr/>
+          <p:nvPr/>
+        </p:nvSpPr>
+        <p:spPr>
+          <a:xfrm>
+            <a:off x="457200" y="3968496"/>
+            <a:ext cx="2708910" cy="1170432"/>
+          </a:xfrm>
+          <a:prstGeom prst="roundRect">
+            <a:avLst>
+              <a:gd name="adj" fmla="val 6000"/>
+            </a:avLst>
+          </a:prstGeom>
+          <a:solidFill>
+            <a:srgbClr val="FFFFFF"/>
+          </a:solidFill>
+          <a:ln w="12700">
+            <a:solidFill>
+              <a:srgbClr val="E4E3DE"/>
+            </a:solidFill>
+          </a:ln>
+          <a:effectLst/>
+        </p:spPr>
+        <p:style>
+          <a:lnRef idx="1">
+            <a:schemeClr val="accent1"/>
+          </a:lnRef>
+          <a:fillRef idx="3">
+            <a:schemeClr val="accent1"/>
+          </a:fillRef>
+          <a:effectRef idx="2">
+            <a:schemeClr val="accent1"/>
+          </a:effectRef>
+          <a:fontRef idx="minor">
+            <a:schemeClr val="lt1"/>
+          </a:fontRef>
+        </p:style>
+        <p:txBody>
+          <a:bodyPr rtlCol="0" anchor="ctr"/>
+          <a:lstStyle/>
+          <a:p/>
+        </p:txBody>
+      </p:sp>
+      <p:sp>
+        <p:nvSpPr>
+          <p:cNvPr id="20" name="TarjetaTxt 4"/>
+          <p:cNvSpPr txBox="1"/>
+          <p:nvPr/>
+        </p:nvSpPr>
+        <p:spPr>
+          <a:xfrm>
+            <a:off x="548640" y="4023360"/>
+            <a:ext cx="2526030" cy="1060704"/>
+          </a:xfrm>
+          <a:prstGeom prst="rect">
+            <a:avLst/>
+          </a:prstGeom>
+          <a:noFill/>
+        </p:spPr>
+        <p:txBody>
+          <a:bodyPr wrap="square" anchor="t" lIns="45720" rIns="45720" tIns="27432" bIns="27432">
+            <a:normAutofit/>
+          </a:bodyPr>
+          <a:lstStyle/>
+          <a:p>
+            <a:pPr algn="l"/>
+            <a:r>
+              <a:rPr sz="1100" b="1">
+                <a:solidFill>
+                  <a:srgbClr val="5B3E83"/>
+                </a:solidFill>
+                <a:latin typeface="Bricolage Grotesque"/>
+              </a:rPr>
+              <a:t>marco</a:t>
+            </a:r>
+          </a:p>
+          <a:p>
+            <a:pPr algn="l"/>
+            <a:r>
+              <a:rPr sz="1000">
+                <a:solidFill>
+                  <a:srgbClr val="20242E"/>
+                </a:solidFill>
+                <a:latin typeface="Inter"/>
+              </a:rPr>
+              <a:t>Se levanta a las … y yo a las …</a:t>
+            </a:r>
+          </a:p>
+        </p:txBody>
+      </p:sp>
+      <p:sp>
+        <p:nvSpPr>
+          <p:cNvPr id="21" name="Tarjeta 5"/>
+          <p:cNvSpPr/>
+          <p:nvPr/>
+        </p:nvSpPr>
+        <p:spPr>
+          <a:xfrm>
+            <a:off x="3312414" y="3968496"/>
+            <a:ext cx="2708910" cy="1170432"/>
+          </a:xfrm>
+          <a:prstGeom prst="roundRect">
+            <a:avLst>
+              <a:gd name="adj" fmla="val 6000"/>
+            </a:avLst>
+          </a:prstGeom>
+          <a:solidFill>
+            <a:srgbClr val="FFFFFF"/>
+          </a:solidFill>
+          <a:ln w="12700">
+            <a:solidFill>
+              <a:srgbClr val="E4E3DE"/>
+            </a:solidFill>
+          </a:ln>
+          <a:effectLst/>
+        </p:spPr>
+        <p:style>
+          <a:lnRef idx="1">
+            <a:schemeClr val="accent1"/>
+          </a:lnRef>
+          <a:fillRef idx="3">
+            <a:schemeClr val="accent1"/>
+          </a:fillRef>
+          <a:effectRef idx="2">
+            <a:schemeClr val="accent1"/>
+          </a:effectRef>
+          <a:fontRef idx="minor">
+            <a:schemeClr val="lt1"/>
+          </a:fontRef>
+        </p:style>
+        <p:txBody>
+          <a:bodyPr rtlCol="0" anchor="ctr"/>
+          <a:lstStyle/>
+          <a:p/>
+        </p:txBody>
+      </p:sp>
+      <p:sp>
+        <p:nvSpPr>
+          <p:cNvPr id="22" name="TarjetaTxt 5"/>
+          <p:cNvSpPr txBox="1"/>
+          <p:nvPr/>
+        </p:nvSpPr>
+        <p:spPr>
+          <a:xfrm>
+            <a:off x="3403854" y="4023360"/>
+            <a:ext cx="2526030" cy="1060704"/>
+          </a:xfrm>
+          <a:prstGeom prst="rect">
+            <a:avLst/>
+          </a:prstGeom>
+          <a:noFill/>
+        </p:spPr>
+        <p:txBody>
+          <a:bodyPr wrap="square" anchor="t" lIns="45720" rIns="45720" tIns="27432" bIns="27432">
+            <a:normAutofit/>
+          </a:bodyPr>
+          <a:lstStyle/>
+          <a:p>
+            <a:pPr algn="l"/>
+            <a:r>
+              <a:rPr sz="1100" b="1">
+                <a:solidFill>
+                  <a:srgbClr val="5B3E83"/>
+                </a:solidFill>
+                <a:latin typeface="Bricolage Grotesque"/>
+              </a:rPr>
+              <a:t>marco</a:t>
+            </a:r>
+          </a:p>
+          <a:p>
+            <a:pPr algn="l"/>
+            <a:r>
+              <a:rPr sz="1000">
+                <a:solidFill>
+                  <a:srgbClr val="20242E"/>
+                </a:solidFill>
+                <a:latin typeface="Inter"/>
+              </a:rPr>
+              <a:t>Mientras él/ella …, yo …</a:t>
+            </a:r>
+          </a:p>
+        </p:txBody>
+      </p:sp>
+      <p:sp>
+        <p:nvSpPr>
+          <p:cNvPr id="23" name="Tarjeta 6"/>
+          <p:cNvSpPr/>
+          <p:nvPr/>
+        </p:nvSpPr>
+        <p:spPr>
+          <a:xfrm>
+            <a:off x="6167628" y="3968496"/>
+            <a:ext cx="2708910" cy="1170432"/>
+          </a:xfrm>
+          <a:prstGeom prst="roundRect">
+            <a:avLst>
+              <a:gd name="adj" fmla="val 6000"/>
+            </a:avLst>
+          </a:prstGeom>
+          <a:solidFill>
+            <a:srgbClr val="FFFFFF"/>
+          </a:solidFill>
+          <a:ln w="12700">
+            <a:solidFill>
+              <a:srgbClr val="E4E3DE"/>
+            </a:solidFill>
+          </a:ln>
+          <a:effectLst/>
+        </p:spPr>
+        <p:style>
+          <a:lnRef idx="1">
+            <a:schemeClr val="accent1"/>
+          </a:lnRef>
+          <a:fillRef idx="3">
+            <a:schemeClr val="accent1"/>
+          </a:fillRef>
+          <a:effectRef idx="2">
+            <a:schemeClr val="accent1"/>
+          </a:effectRef>
+          <a:fontRef idx="minor">
+            <a:schemeClr val="lt1"/>
+          </a:fontRef>
+        </p:style>
+        <p:txBody>
+          <a:bodyPr rtlCol="0" anchor="ctr"/>
+          <a:lstStyle/>
+          <a:p/>
+        </p:txBody>
+      </p:sp>
+      <p:sp>
+        <p:nvSpPr>
+          <p:cNvPr id="24" name="TarjetaTxt 6"/>
+          <p:cNvSpPr txBox="1"/>
+          <p:nvPr/>
+        </p:nvSpPr>
+        <p:spPr>
+          <a:xfrm>
+            <a:off x="6259068" y="4023360"/>
+            <a:ext cx="2526030" cy="1060704"/>
+          </a:xfrm>
+          <a:prstGeom prst="rect">
+            <a:avLst/>
+          </a:prstGeom>
+          <a:noFill/>
+        </p:spPr>
+        <p:txBody>
+          <a:bodyPr wrap="square" anchor="t" lIns="45720" rIns="45720" tIns="27432" bIns="27432">
+            <a:normAutofit/>
+          </a:bodyPr>
+          <a:lstStyle/>
+          <a:p>
+            <a:pPr algn="l"/>
+            <a:r>
+              <a:rPr sz="1100" b="1">
+                <a:solidFill>
+                  <a:srgbClr val="5B3E83"/>
+                </a:solidFill>
+                <a:latin typeface="Bricolage Grotesque"/>
+              </a:rPr>
+              <a:t>marco</a:t>
+            </a:r>
+          </a:p>
+          <a:p>
+            <a:pPr algn="l"/>
+            <a:r>
+              <a:rPr sz="1000">
+                <a:solidFill>
+                  <a:srgbClr val="20242E"/>
+                </a:solidFill>
+                <a:latin typeface="Inter"/>
+              </a:rPr>
+              <a:t>Lo que me parece imposible es …</a:t>
+            </a:r>
+          </a:p>
+        </p:txBody>
+      </p:sp>
+      <p:sp>
+        <p:nvSpPr>
+          <p:cNvPr id="25" name="Tarjeta 7"/>
+          <p:cNvSpPr/>
+          <p:nvPr/>
+        </p:nvSpPr>
+        <p:spPr>
+          <a:xfrm>
+            <a:off x="9022842" y="3968496"/>
+            <a:ext cx="2708910" cy="1170432"/>
+          </a:xfrm>
+          <a:prstGeom prst="roundRect">
+            <a:avLst>
+              <a:gd name="adj" fmla="val 6000"/>
+            </a:avLst>
+          </a:prstGeom>
+          <a:solidFill>
+            <a:srgbClr val="FFFFFF"/>
+          </a:solidFill>
+          <a:ln w="12700">
+            <a:solidFill>
+              <a:srgbClr val="E4E3DE"/>
+            </a:solidFill>
+          </a:ln>
+          <a:effectLst/>
+        </p:spPr>
+        <p:style>
+          <a:lnRef idx="1">
+            <a:schemeClr val="accent1"/>
+          </a:lnRef>
+          <a:fillRef idx="3">
+            <a:schemeClr val="accent1"/>
+          </a:fillRef>
+          <a:effectRef idx="2">
+            <a:schemeClr val="accent1"/>
+          </a:effectRef>
+          <a:fontRef idx="minor">
+            <a:schemeClr val="lt1"/>
+          </a:fontRef>
+        </p:style>
+        <p:txBody>
+          <a:bodyPr rtlCol="0" anchor="ctr"/>
+          <a:lstStyle/>
+          <a:p/>
+        </p:txBody>
+      </p:sp>
+      <p:sp>
+        <p:nvSpPr>
+          <p:cNvPr id="26" name="TarjetaTxt 7"/>
+          <p:cNvSpPr txBox="1"/>
+          <p:nvPr/>
+        </p:nvSpPr>
+        <p:spPr>
+          <a:xfrm>
+            <a:off x="9114282" y="4023360"/>
+            <a:ext cx="2526030" cy="1060704"/>
+          </a:xfrm>
+          <a:prstGeom prst="rect">
+            <a:avLst/>
+          </a:prstGeom>
+          <a:noFill/>
+        </p:spPr>
+        <p:txBody>
+          <a:bodyPr wrap="square" anchor="t" lIns="45720" rIns="45720" tIns="27432" bIns="27432">
+            <a:normAutofit/>
+          </a:bodyPr>
+          <a:lstStyle/>
+          <a:p>
+            <a:pPr algn="l"/>
+            <a:r>
+              <a:rPr sz="1100" b="1">
+                <a:solidFill>
+                  <a:srgbClr val="5B3E83"/>
+                </a:solidFill>
+                <a:latin typeface="Bricolage Grotesque"/>
+              </a:rPr>
+              <a:t>marco</a:t>
+            </a:r>
+          </a:p>
+          <a:p>
+            <a:pPr algn="l"/>
+            <a:r>
+              <a:rPr sz="1000">
+                <a:solidFill>
+                  <a:srgbClr val="20242E"/>
+                </a:solidFill>
+                <a:latin typeface="Inter"/>
+              </a:rPr>
+              <a:t>Yo no puedo … , porque …</a:t>
+            </a:r>
+          </a:p>
+        </p:txBody>
+      </p:sp>
+      <p:sp>
+        <p:nvSpPr>
+          <p:cNvPr id="27" name="Tarjeta 8"/>
+          <p:cNvSpPr/>
+          <p:nvPr/>
+        </p:nvSpPr>
+        <p:spPr>
+          <a:xfrm>
+            <a:off x="457200" y="5266944"/>
+            <a:ext cx="2708910" cy="1170432"/>
+          </a:xfrm>
+          <a:prstGeom prst="roundRect">
+            <a:avLst>
+              <a:gd name="adj" fmla="val 6000"/>
+            </a:avLst>
+          </a:prstGeom>
+          <a:solidFill>
+            <a:srgbClr val="FFFFFF"/>
+          </a:solidFill>
+          <a:ln w="12700">
+            <a:solidFill>
+              <a:srgbClr val="E4E3DE"/>
+            </a:solidFill>
+          </a:ln>
+          <a:effectLst/>
+        </p:spPr>
+        <p:style>
+          <a:lnRef idx="1">
+            <a:schemeClr val="accent1"/>
+          </a:lnRef>
+          <a:fillRef idx="3">
+            <a:schemeClr val="accent1"/>
+          </a:fillRef>
+          <a:effectRef idx="2">
+            <a:schemeClr val="accent1"/>
+          </a:effectRef>
+          <a:fontRef idx="minor">
+            <a:schemeClr val="lt1"/>
+          </a:fontRef>
+        </p:style>
+        <p:txBody>
+          <a:bodyPr rtlCol="0" anchor="ctr"/>
+          <a:lstStyle/>
+          <a:p/>
+        </p:txBody>
+      </p:sp>
+      <p:sp>
+        <p:nvSpPr>
+          <p:cNvPr id="28" name="TarjetaTxt 8"/>
+          <p:cNvSpPr txBox="1"/>
+          <p:nvPr/>
+        </p:nvSpPr>
+        <p:spPr>
+          <a:xfrm>
+            <a:off x="548640" y="5321808"/>
+            <a:ext cx="2526030" cy="1060704"/>
+          </a:xfrm>
+          <a:prstGeom prst="rect">
+            <a:avLst/>
+          </a:prstGeom>
+          <a:noFill/>
+        </p:spPr>
+        <p:txBody>
+          <a:bodyPr wrap="square" anchor="t" lIns="45720" rIns="45720" tIns="27432" bIns="27432">
+            <a:normAutofit/>
+          </a:bodyPr>
+          <a:lstStyle/>
+          <a:p>
+            <a:pPr algn="l"/>
+            <a:r>
+              <a:rPr sz="1100" b="1">
+                <a:solidFill>
+                  <a:srgbClr val="5B3E83"/>
+                </a:solidFill>
+                <a:latin typeface="Bricolage Grotesque"/>
+              </a:rPr>
+              <a:t>marco</a:t>
+            </a:r>
+          </a:p>
+          <a:p>
+            <a:pPr algn="l"/>
+            <a:r>
+              <a:rPr sz="1000">
+                <a:solidFill>
+                  <a:srgbClr val="20242E"/>
+                </a:solidFill>
+                <a:latin typeface="Inter"/>
+              </a:rPr>
+              <a:t>En eso nos parecemos: los dos nos …</a:t>
             </a:r>
           </a:p>
         </p:txBody>
